--- a/reference_copying.pptx
+++ b/reference_copying.pptx
@@ -5582,8 +5582,8 @@
         </p:nvSpPr>
         <p:spPr>
           <a:xfrm>
-            <a:off x="463960" y="2774757"/>
-            <a:ext cx="1570434" cy="376113"/>
+            <a:off x="463958" y="2774757"/>
+            <a:ext cx="1570435" cy="376113"/>
           </a:xfrm>
           <a:prstGeom prst="rect">
             <a:avLst/>
@@ -5704,7 +5704,7 @@
         <p:spPr>
           <a:xfrm>
             <a:off x="2595048" y="2774757"/>
-            <a:ext cx="2166312" cy="290388"/>
+            <a:ext cx="2166313" cy="290388"/>
           </a:xfrm>
           <a:prstGeom prst="rect">
             <a:avLst/>
@@ -5762,7 +5762,7 @@
         <p:spPr>
           <a:xfrm>
             <a:off x="2595048" y="3342221"/>
-            <a:ext cx="2598272" cy="286393"/>
+            <a:ext cx="2598273" cy="286393"/>
           </a:xfrm>
           <a:prstGeom prst="rect">
             <a:avLst/>
@@ -6714,7 +6714,7 @@
         <p:spPr>
           <a:xfrm>
             <a:off x="2595046" y="2225402"/>
-            <a:ext cx="2598275" cy="288787"/>
+            <a:ext cx="2598276" cy="288787"/>
           </a:xfrm>
           <a:prstGeom prst="rect">
             <a:avLst/>
@@ -6801,7 +6801,7 @@
         </p:nvSpPr>
         <p:spPr>
           <a:xfrm>
-            <a:off x="463960" y="1712379"/>
+            <a:off x="463958" y="1712379"/>
             <a:ext cx="1570435" cy="371732"/>
           </a:xfrm>
           <a:prstGeom prst="rect">
@@ -6949,9 +6949,19 @@
                 <a:latin typeface="충북대70주년체 Regular"/>
                 <a:ea typeface="충북대70주년체 Regular"/>
               </a:rPr>
-              <a:t>개요</a:t>
-            </a:r>
-            <a:endParaRPr lang="ko-KR" altLang="en-US" sz="3500" b="1">
+              <a:t>넌 착해</a:t>
+            </a:r>
+            <a:r>
+              <a:rPr lang="en-US" altLang="ko-KR" sz="3500" b="1">
+                <a:solidFill>
+                  <a:srgbClr val="ecedf1"/>
+                </a:solidFill>
+                <a:latin typeface="충북대70주년체 Regular"/>
+                <a:ea typeface="충북대70주년체 Regular"/>
+              </a:rPr>
+              <a:t>!</a:t>
+            </a:r>
+            <a:endParaRPr lang="en-US" altLang="ko-KR" sz="3500" b="1">
               <a:solidFill>
                 <a:srgbClr val="ecedf1"/>
               </a:solidFill>
@@ -6963,19 +6973,19 @@
       </p:sp>
       <p:sp>
         <p:nvSpPr>
-          <p:cNvPr id="75" name="뺄셈 기호 74"/>
-          <p:cNvSpPr/>
+          <p:cNvPr id="82" name="타원 81"/>
+          <p:cNvSpPr>
+            <a:spLocks noChangeAspect="1"/>
+          </p:cNvSpPr>
           <p:nvPr/>
         </p:nvSpPr>
         <p:spPr>
           <a:xfrm>
-            <a:off x="1513246" y="867485"/>
-            <a:ext cx="317500" cy="283134"/>
-          </a:xfrm>
-          <a:prstGeom prst="mathMinus">
-            <a:avLst>
-              <a:gd name="adj1" fmla="val 23520"/>
-            </a:avLst>
+            <a:off x="9531736" y="6344936"/>
+            <a:ext cx="513064" cy="513064"/>
+          </a:xfrm>
+          <a:prstGeom prst="ellipse">
+            <a:avLst/>
           </a:prstGeom>
           <a:solidFill>
             <a:srgbClr val="ecedf1"/>
@@ -7013,22 +7023,130 @@
       </p:sp>
       <p:sp>
         <p:nvSpPr>
-          <p:cNvPr id="76" name="뺄셈 기호 75"/>
-          <p:cNvSpPr/>
+          <p:cNvPr id="83" name="TextBox 1"/>
+          <p:cNvSpPr txBox="1"/>
           <p:nvPr/>
         </p:nvSpPr>
         <p:spPr>
           <a:xfrm>
-            <a:off x="1195746" y="867485"/>
-            <a:ext cx="317500" cy="283134"/>
-          </a:xfrm>
-          <a:prstGeom prst="mathMinus">
-            <a:avLst>
-              <a:gd name="adj1" fmla="val 23520"/>
-            </a:avLst>
+            <a:off x="9316166" y="0"/>
+            <a:ext cx="1457269" cy="1150620"/>
+          </a:xfrm>
+          <a:prstGeom prst="rect">
+            <a:avLst/>
+          </a:prstGeom>
+          <a:noFill/>
+        </p:spPr>
+        <p:txBody>
+          <a:bodyPr wrap="square">
+            <a:spAutoFit/>
+          </a:bodyPr>
+          <a:lstStyle/>
+          <a:p>
+            <a:pPr lvl="0">
+              <a:defRPr/>
+            </a:pPr>
+            <a:r>
+              <a:rPr lang="ko-KR" altLang="en-US" sz="1900">
+                <a:latin typeface="충북대70주년체 Regular"/>
+                <a:ea typeface="충북대70주년체 Regular"/>
+              </a:rPr>
+              <a:t>글자 크기</a:t>
+            </a:r>
+            <a:endParaRPr lang="ko-KR" altLang="en-US">
+              <a:latin typeface="충북대70주년체 Regular"/>
+              <a:ea typeface="충북대70주년체 Regular"/>
+            </a:endParaRPr>
+          </a:p>
+          <a:p>
+            <a:pPr lvl="0">
+              <a:defRPr/>
+            </a:pPr>
+            <a:r>
+              <a:rPr lang="ko-KR" altLang="en-US" sz="2600">
+                <a:latin typeface="충북대70주년체 Regular"/>
+                <a:ea typeface="충북대70주년체 Regular"/>
+              </a:rPr>
+              <a:t>ㄱ </a:t>
+            </a:r>
+            <a:r>
+              <a:rPr lang="en-US" altLang="ko-KR" sz="2600">
+                <a:latin typeface="충북대70주년체 Regular"/>
+                <a:ea typeface="충북대70주년체 Regular"/>
+              </a:rPr>
+              <a:t>(35)</a:t>
+            </a:r>
+            <a:endParaRPr lang="en-US" altLang="ko-KR" sz="2600">
+              <a:latin typeface="충북대70주년체 Regular"/>
+              <a:ea typeface="충북대70주년체 Regular"/>
+            </a:endParaRPr>
+          </a:p>
+          <a:p>
+            <a:pPr lvl="0">
+              <a:defRPr/>
+            </a:pPr>
+            <a:r>
+              <a:rPr lang="ko-KR" altLang="en-US" sz="1400">
+                <a:latin typeface="충북대70주년체 Regular"/>
+                <a:ea typeface="충북대70주년체 Regular"/>
+              </a:rPr>
+              <a:t>ㄱ </a:t>
+            </a:r>
+            <a:r>
+              <a:rPr lang="en-US" altLang="ko-KR" sz="1400">
+                <a:latin typeface="충북대70주년체 Regular"/>
+                <a:ea typeface="충북대70주년체 Regular"/>
+              </a:rPr>
+              <a:t>(19)</a:t>
+            </a:r>
+            <a:endParaRPr lang="en-US" altLang="ko-KR" sz="1400">
+              <a:latin typeface="충북대70주년체 Regular"/>
+              <a:ea typeface="충북대70주년체 Regular"/>
+            </a:endParaRPr>
+          </a:p>
+          <a:p>
+            <a:pPr lvl="0">
+              <a:defRPr/>
+            </a:pPr>
+            <a:r>
+              <a:rPr lang="ko-KR" altLang="en-US" sz="1100">
+                <a:latin typeface="충북대70주년체 Regular"/>
+                <a:ea typeface="충북대70주년체 Regular"/>
+              </a:rPr>
+              <a:t>ㄱ </a:t>
+            </a:r>
+            <a:r>
+              <a:rPr lang="en-US" altLang="ko-KR" sz="1100">
+                <a:latin typeface="충북대70주년체 Regular"/>
+                <a:ea typeface="충북대70주년체 Regular"/>
+              </a:rPr>
+              <a:t>(11)</a:t>
+            </a:r>
+            <a:endParaRPr lang="en-US" altLang="ko-KR" sz="1100">
+              <a:latin typeface="충북대70주년체 Regular"/>
+              <a:ea typeface="충북대70주년체 Regular"/>
+            </a:endParaRPr>
+          </a:p>
+        </p:txBody>
+      </p:sp>
+      <p:sp>
+        <p:nvSpPr>
+          <p:cNvPr id="84" name="타원 83"/>
+          <p:cNvSpPr>
+            <a:spLocks noChangeAspect="1"/>
+          </p:cNvSpPr>
+          <p:nvPr/>
+        </p:nvSpPr>
+        <p:spPr>
+          <a:xfrm>
+            <a:off x="9531736" y="2188448"/>
+            <a:ext cx="513064" cy="513064"/>
+          </a:xfrm>
+          <a:prstGeom prst="ellipse">
+            <a:avLst/>
           </a:prstGeom>
           <a:solidFill>
-            <a:srgbClr val="ecedf1"/>
+            <a:srgbClr val="eb657e"/>
           </a:solidFill>
           <a:ln>
             <a:noFill/>
@@ -7063,22 +7181,22 @@
       </p:sp>
       <p:sp>
         <p:nvSpPr>
-          <p:cNvPr id="77" name="뺄셈 기호 76"/>
-          <p:cNvSpPr/>
+          <p:cNvPr id="85" name="타원 84"/>
+          <p:cNvSpPr>
+            <a:spLocks noChangeAspect="1"/>
+          </p:cNvSpPr>
           <p:nvPr/>
         </p:nvSpPr>
         <p:spPr>
           <a:xfrm>
-            <a:off x="878246" y="867485"/>
-            <a:ext cx="317500" cy="283134"/>
-          </a:xfrm>
-          <a:prstGeom prst="mathMinus">
-            <a:avLst>
-              <a:gd name="adj1" fmla="val 23520"/>
-            </a:avLst>
+            <a:off x="9531736" y="2833338"/>
+            <a:ext cx="513064" cy="513064"/>
+          </a:xfrm>
+          <a:prstGeom prst="ellipse">
+            <a:avLst/>
           </a:prstGeom>
           <a:solidFill>
-            <a:srgbClr val="ecedf1"/>
+            <a:srgbClr val="fce891"/>
           </a:solidFill>
           <a:ln>
             <a:noFill/>
@@ -7113,22 +7231,22 @@
       </p:sp>
       <p:sp>
         <p:nvSpPr>
-          <p:cNvPr id="78" name="뺄셈 기호 77"/>
-          <p:cNvSpPr/>
+          <p:cNvPr id="86" name="타원 85"/>
+          <p:cNvSpPr>
+            <a:spLocks noChangeAspect="1"/>
+          </p:cNvSpPr>
           <p:nvPr/>
         </p:nvSpPr>
         <p:spPr>
           <a:xfrm>
-            <a:off x="560746" y="867485"/>
-            <a:ext cx="317500" cy="283134"/>
-          </a:xfrm>
-          <a:prstGeom prst="mathMinus">
-            <a:avLst>
-              <a:gd name="adj1" fmla="val 23520"/>
-            </a:avLst>
+            <a:off x="9531736" y="3528964"/>
+            <a:ext cx="513064" cy="513064"/>
+          </a:xfrm>
+          <a:prstGeom prst="ellipse">
+            <a:avLst/>
           </a:prstGeom>
           <a:solidFill>
-            <a:srgbClr val="fce891"/>
+            <a:srgbClr val="496f78"/>
           </a:solidFill>
           <a:ln>
             <a:noFill/>
@@ -7163,7 +7281,7 @@
       </p:sp>
       <p:sp>
         <p:nvSpPr>
-          <p:cNvPr id="82" name="타원 81"/>
+          <p:cNvPr id="87" name="타원 86"/>
           <p:cNvSpPr>
             <a:spLocks noChangeAspect="1"/>
           </p:cNvSpPr>
@@ -7171,14 +7289,14 @@
         </p:nvSpPr>
         <p:spPr>
           <a:xfrm>
-            <a:off x="9531736" y="6344936"/>
+            <a:off x="9531736" y="4897779"/>
             <a:ext cx="513064" cy="513064"/>
           </a:xfrm>
           <a:prstGeom prst="ellipse">
             <a:avLst/>
           </a:prstGeom>
           <a:solidFill>
-            <a:srgbClr val="ecedf1"/>
+            <a:srgbClr val="8b5587"/>
           </a:solidFill>
           <a:ln>
             <a:noFill/>
@@ -7213,130 +7331,22 @@
       </p:sp>
       <p:sp>
         <p:nvSpPr>
-          <p:cNvPr id="83" name="TextBox 1"/>
-          <p:cNvSpPr txBox="1"/>
+          <p:cNvPr id="88" name="타원 87"/>
+          <p:cNvSpPr>
+            <a:spLocks noChangeAspect="1"/>
+          </p:cNvSpPr>
           <p:nvPr/>
         </p:nvSpPr>
         <p:spPr>
           <a:xfrm>
-            <a:off x="9316166" y="0"/>
-            <a:ext cx="1457269" cy="1150620"/>
-          </a:xfrm>
-          <a:prstGeom prst="rect">
-            <a:avLst/>
-          </a:prstGeom>
-          <a:noFill/>
-        </p:spPr>
-        <p:txBody>
-          <a:bodyPr wrap="square">
-            <a:spAutoFit/>
-          </a:bodyPr>
-          <a:lstStyle/>
-          <a:p>
-            <a:pPr lvl="0">
-              <a:defRPr/>
-            </a:pPr>
-            <a:r>
-              <a:rPr lang="ko-KR" altLang="en-US" sz="1900">
-                <a:latin typeface="충북대70주년체 Regular"/>
-                <a:ea typeface="충북대70주년체 Regular"/>
-              </a:rPr>
-              <a:t>글자 크기</a:t>
-            </a:r>
-            <a:endParaRPr lang="ko-KR" altLang="en-US">
-              <a:latin typeface="충북대70주년체 Regular"/>
-              <a:ea typeface="충북대70주년체 Regular"/>
-            </a:endParaRPr>
-          </a:p>
-          <a:p>
-            <a:pPr lvl="0">
-              <a:defRPr/>
-            </a:pPr>
-            <a:r>
-              <a:rPr lang="ko-KR" altLang="en-US" sz="2600">
-                <a:latin typeface="충북대70주년체 Regular"/>
-                <a:ea typeface="충북대70주년체 Regular"/>
-              </a:rPr>
-              <a:t>ㄱ </a:t>
-            </a:r>
-            <a:r>
-              <a:rPr lang="en-US" altLang="ko-KR" sz="2600">
-                <a:latin typeface="충북대70주년체 Regular"/>
-                <a:ea typeface="충북대70주년체 Regular"/>
-              </a:rPr>
-              <a:t>(35)</a:t>
-            </a:r>
-            <a:endParaRPr lang="en-US" altLang="ko-KR" sz="2600">
-              <a:latin typeface="충북대70주년체 Regular"/>
-              <a:ea typeface="충북대70주년체 Regular"/>
-            </a:endParaRPr>
-          </a:p>
-          <a:p>
-            <a:pPr lvl="0">
-              <a:defRPr/>
-            </a:pPr>
-            <a:r>
-              <a:rPr lang="ko-KR" altLang="en-US" sz="1400">
-                <a:latin typeface="충북대70주년체 Regular"/>
-                <a:ea typeface="충북대70주년체 Regular"/>
-              </a:rPr>
-              <a:t>ㄱ </a:t>
-            </a:r>
-            <a:r>
-              <a:rPr lang="en-US" altLang="ko-KR" sz="1400">
-                <a:latin typeface="충북대70주년체 Regular"/>
-                <a:ea typeface="충북대70주년체 Regular"/>
-              </a:rPr>
-              <a:t>(19)</a:t>
-            </a:r>
-            <a:endParaRPr lang="en-US" altLang="ko-KR" sz="1400">
-              <a:latin typeface="충북대70주년체 Regular"/>
-              <a:ea typeface="충북대70주년체 Regular"/>
-            </a:endParaRPr>
-          </a:p>
-          <a:p>
-            <a:pPr lvl="0">
-              <a:defRPr/>
-            </a:pPr>
-            <a:r>
-              <a:rPr lang="ko-KR" altLang="en-US" sz="1100">
-                <a:latin typeface="충북대70주년체 Regular"/>
-                <a:ea typeface="충북대70주년체 Regular"/>
-              </a:rPr>
-              <a:t>ㄱ </a:t>
-            </a:r>
-            <a:r>
-              <a:rPr lang="en-US" altLang="ko-KR" sz="1100">
-                <a:latin typeface="충북대70주년체 Regular"/>
-                <a:ea typeface="충북대70주년체 Regular"/>
-              </a:rPr>
-              <a:t>(11)</a:t>
-            </a:r>
-            <a:endParaRPr lang="en-US" altLang="ko-KR" sz="1100">
-              <a:latin typeface="충북대70주년체 Regular"/>
-              <a:ea typeface="충북대70주년체 Regular"/>
-            </a:endParaRPr>
-          </a:p>
-        </p:txBody>
-      </p:sp>
-      <p:sp>
-        <p:nvSpPr>
-          <p:cNvPr id="84" name="타원 83"/>
-          <p:cNvSpPr>
-            <a:spLocks noChangeAspect="1"/>
-          </p:cNvSpPr>
-          <p:nvPr/>
-        </p:nvSpPr>
-        <p:spPr>
-          <a:xfrm>
-            <a:off x="9531736" y="2188448"/>
+            <a:off x="9531736" y="4234481"/>
             <a:ext cx="513064" cy="513064"/>
           </a:xfrm>
           <a:prstGeom prst="ellipse">
             <a:avLst/>
           </a:prstGeom>
           <a:solidFill>
-            <a:srgbClr val="eb657e"/>
+            <a:srgbClr val="767779"/>
           </a:solidFill>
           <a:ln>
             <a:noFill/>
@@ -7371,7 +7381,7 @@
       </p:sp>
       <p:sp>
         <p:nvSpPr>
-          <p:cNvPr id="85" name="타원 84"/>
+          <p:cNvPr id="89" name="타원 88"/>
           <p:cNvSpPr>
             <a:spLocks noChangeAspect="1"/>
           </p:cNvSpPr>
@@ -7379,14 +7389,14 @@
         </p:nvSpPr>
         <p:spPr>
           <a:xfrm>
-            <a:off x="9531736" y="2833338"/>
+            <a:off x="9531736" y="5627054"/>
             <a:ext cx="513064" cy="513064"/>
           </a:xfrm>
           <a:prstGeom prst="ellipse">
             <a:avLst/>
           </a:prstGeom>
           <a:solidFill>
-            <a:srgbClr val="fce891"/>
+            <a:srgbClr val="1e0d20"/>
           </a:solidFill>
           <a:ln>
             <a:noFill/>
@@ -7421,214 +7431,143 @@
       </p:sp>
       <p:sp>
         <p:nvSpPr>
-          <p:cNvPr id="86" name="타원 85"/>
-          <p:cNvSpPr>
-            <a:spLocks noChangeAspect="1"/>
-          </p:cNvSpPr>
+          <p:cNvPr id="90" name="TextBox 1"/>
+          <p:cNvSpPr txBox="1"/>
           <p:nvPr/>
         </p:nvSpPr>
         <p:spPr>
           <a:xfrm>
-            <a:off x="9531736" y="3528964"/>
-            <a:ext cx="513064" cy="513064"/>
-          </a:xfrm>
-          <a:prstGeom prst="ellipse">
+            <a:off x="9316166" y="1301432"/>
+            <a:ext cx="1965269" cy="668338"/>
+          </a:xfrm>
+          <a:prstGeom prst="rect">
             <a:avLst/>
           </a:prstGeom>
-          <a:solidFill>
-            <a:srgbClr val="496f78"/>
-          </a:solidFill>
-          <a:ln>
-            <a:noFill/>
+          <a:noFill/>
+        </p:spPr>
+        <p:txBody>
+          <a:bodyPr wrap="square">
+            <a:spAutoFit/>
+          </a:bodyPr>
+          <a:lstStyle/>
+          <a:p>
+            <a:pPr lvl="0">
+              <a:defRPr/>
+            </a:pPr>
+            <a:r>
+              <a:rPr lang="ko-KR" altLang="en-US" sz="1900">
+                <a:latin typeface="충북대70주년체 Regular"/>
+                <a:ea typeface="충북대70주년체 Regular"/>
+              </a:rPr>
+              <a:t>글꼴</a:t>
+            </a:r>
+            <a:endParaRPr lang="ko-KR" altLang="en-US" sz="1900">
+              <a:latin typeface="충북대70주년체 Regular"/>
+              <a:ea typeface="충북대70주년체 Regular"/>
+            </a:endParaRPr>
+          </a:p>
+          <a:p>
+            <a:pPr lvl="0">
+              <a:defRPr/>
+            </a:pPr>
+            <a:r>
+              <a:rPr lang="ko-KR" altLang="en-US" sz="1900">
+                <a:latin typeface="충북대70주년체 Regular"/>
+                <a:ea typeface="충북대70주년체 Regular"/>
+              </a:rPr>
+              <a:t>충북대</a:t>
+            </a:r>
+            <a:r>
+              <a:rPr lang="en-US" altLang="ko-KR" sz="1900">
+                <a:latin typeface="충북대70주년체 Regular"/>
+                <a:ea typeface="충북대70주년체 Regular"/>
+              </a:rPr>
+              <a:t>70</a:t>
+            </a:r>
+            <a:r>
+              <a:rPr lang="ko-KR" altLang="en-US" sz="1900">
+                <a:latin typeface="충북대70주년체 Regular"/>
+                <a:ea typeface="충북대70주년체 Regular"/>
+              </a:rPr>
+              <a:t>주년체</a:t>
+            </a:r>
+            <a:endParaRPr lang="ko-KR" altLang="en-US" sz="1900">
+              <a:latin typeface="충북대70주년체 Regular"/>
+              <a:ea typeface="충북대70주년체 Regular"/>
+            </a:endParaRPr>
+          </a:p>
+        </p:txBody>
+      </p:sp>
+      <p:cxnSp>
+        <p:nvCxnSpPr>
+          <p:cNvPr id="91" name="선 90"/>
+          <p:cNvCxnSpPr/>
+          <p:nvPr/>
+        </p:nvCxnSpPr>
+        <p:spPr>
+          <a:xfrm rot="16200000" flipH="1" flipV="1">
+            <a:off x="110942" y="3960321"/>
+            <a:ext cx="4495885" cy="0"/>
+          </a:xfrm>
+          <a:prstGeom prst="line">
+            <a:avLst/>
+          </a:prstGeom>
+          <a:ln w="25400">
+            <a:solidFill>
+              <a:srgbClr val="767779"/>
+            </a:solidFill>
           </a:ln>
         </p:spPr>
         <p:style>
-          <a:lnRef idx="2">
-            <a:schemeClr val="accent1">
-              <a:shade val="20000"/>
-            </a:schemeClr>
+          <a:lnRef idx="1">
+            <a:schemeClr val="accent1"/>
           </a:lnRef>
-          <a:fillRef idx="1">
+          <a:fillRef idx="0">
             <a:schemeClr val="accent1"/>
           </a:fillRef>
           <a:effectRef idx="0">
             <a:schemeClr val="accent1"/>
           </a:effectRef>
           <a:fontRef idx="minor">
-            <a:schemeClr val="lt1"/>
+            <a:schemeClr val="tx1"/>
           </a:fontRef>
         </p:style>
-        <p:txBody>
-          <a:bodyPr anchor="ctr"/>
-          <a:lstStyle/>
-          <a:p>
-            <a:pPr lvl="0" algn="ctr">
-              <a:defRPr/>
-            </a:pPr>
-            <a:endParaRPr lang="ko-KR" altLang="en-US"/>
-          </a:p>
-        </p:txBody>
-      </p:sp>
-      <p:sp>
-        <p:nvSpPr>
-          <p:cNvPr id="87" name="타원 86"/>
-          <p:cNvSpPr>
-            <a:spLocks noChangeAspect="1"/>
-          </p:cNvSpPr>
+      </p:cxnSp>
+      <p:pic>
+        <p:nvPicPr>
+          <p:cNvPr id="92" name="그림 91"/>
+          <p:cNvPicPr>
+            <a:picLocks noChangeAspect="1"/>
+          </p:cNvPicPr>
           <p:nvPr/>
-        </p:nvSpPr>
-        <p:spPr>
-          <a:xfrm>
-            <a:off x="9531736" y="4897779"/>
-            <a:ext cx="513064" cy="513064"/>
-          </a:xfrm>
-          <a:prstGeom prst="ellipse">
+        </p:nvPicPr>
+        <p:blipFill rotWithShape="1">
+          <a:blip r:embed="rId3"/>
+          <a:srcRect l="12970" t="64590" r="70450" b="3750"/>
+          <a:stretch>
+            <a:fillRect/>
+          </a:stretch>
+        </p:blipFill>
+        <p:spPr>
+          <a:xfrm flipH="1">
+            <a:off x="8476478" y="238648"/>
+            <a:ext cx="352522" cy="673322"/>
+          </a:xfrm>
+          <a:prstGeom prst="rect">
             <a:avLst/>
           </a:prstGeom>
-          <a:solidFill>
-            <a:srgbClr val="8b5587"/>
-          </a:solidFill>
-          <a:ln>
-            <a:noFill/>
-          </a:ln>
-        </p:spPr>
-        <p:style>
-          <a:lnRef idx="2">
-            <a:schemeClr val="accent1">
-              <a:shade val="20000"/>
-            </a:schemeClr>
-          </a:lnRef>
-          <a:fillRef idx="1">
-            <a:schemeClr val="accent1"/>
-          </a:fillRef>
-          <a:effectRef idx="0">
-            <a:schemeClr val="accent1"/>
-          </a:effectRef>
-          <a:fontRef idx="minor">
-            <a:schemeClr val="lt1"/>
-          </a:fontRef>
-        </p:style>
-        <p:txBody>
-          <a:bodyPr anchor="ctr"/>
-          <a:lstStyle/>
-          <a:p>
-            <a:pPr lvl="0" algn="ctr">
-              <a:defRPr/>
-            </a:pPr>
-            <a:endParaRPr lang="ko-KR" altLang="en-US"/>
-          </a:p>
-        </p:txBody>
-      </p:sp>
-      <p:sp>
-        <p:nvSpPr>
-          <p:cNvPr id="88" name="타원 87"/>
-          <p:cNvSpPr>
-            <a:spLocks noChangeAspect="1"/>
-          </p:cNvSpPr>
-          <p:nvPr/>
-        </p:nvSpPr>
-        <p:spPr>
-          <a:xfrm>
-            <a:off x="9531736" y="4234481"/>
-            <a:ext cx="513064" cy="513064"/>
-          </a:xfrm>
-          <a:prstGeom prst="ellipse">
-            <a:avLst/>
-          </a:prstGeom>
-          <a:solidFill>
-            <a:srgbClr val="767779"/>
-          </a:solidFill>
-          <a:ln>
-            <a:noFill/>
-          </a:ln>
-        </p:spPr>
-        <p:style>
-          <a:lnRef idx="2">
-            <a:schemeClr val="accent1">
-              <a:shade val="20000"/>
-            </a:schemeClr>
-          </a:lnRef>
-          <a:fillRef idx="1">
-            <a:schemeClr val="accent1"/>
-          </a:fillRef>
-          <a:effectRef idx="0">
-            <a:schemeClr val="accent1"/>
-          </a:effectRef>
-          <a:fontRef idx="minor">
-            <a:schemeClr val="lt1"/>
-          </a:fontRef>
-        </p:style>
-        <p:txBody>
-          <a:bodyPr anchor="ctr"/>
-          <a:lstStyle/>
-          <a:p>
-            <a:pPr lvl="0" algn="ctr">
-              <a:defRPr/>
-            </a:pPr>
-            <a:endParaRPr lang="ko-KR" altLang="en-US"/>
-          </a:p>
-        </p:txBody>
-      </p:sp>
-      <p:sp>
-        <p:nvSpPr>
-          <p:cNvPr id="89" name="타원 88"/>
-          <p:cNvSpPr>
-            <a:spLocks noChangeAspect="1"/>
-          </p:cNvSpPr>
-          <p:nvPr/>
-        </p:nvSpPr>
-        <p:spPr>
-          <a:xfrm>
-            <a:off x="9531736" y="5627054"/>
-            <a:ext cx="513064" cy="513064"/>
-          </a:xfrm>
-          <a:prstGeom prst="ellipse">
-            <a:avLst/>
-          </a:prstGeom>
-          <a:solidFill>
-            <a:srgbClr val="1e0d20"/>
-          </a:solidFill>
-          <a:ln>
-            <a:noFill/>
-          </a:ln>
-        </p:spPr>
-        <p:style>
-          <a:lnRef idx="2">
-            <a:schemeClr val="accent1">
-              <a:shade val="20000"/>
-            </a:schemeClr>
-          </a:lnRef>
-          <a:fillRef idx="1">
-            <a:schemeClr val="accent1"/>
-          </a:fillRef>
-          <a:effectRef idx="0">
-            <a:schemeClr val="accent1"/>
-          </a:effectRef>
-          <a:fontRef idx="minor">
-            <a:schemeClr val="lt1"/>
-          </a:fontRef>
-        </p:style>
-        <p:txBody>
-          <a:bodyPr anchor="ctr"/>
-          <a:lstStyle/>
-          <a:p>
-            <a:pPr lvl="0" algn="ctr">
-              <a:defRPr/>
-            </a:pPr>
-            <a:endParaRPr lang="ko-KR" altLang="en-US"/>
-          </a:p>
-        </p:txBody>
-      </p:sp>
-      <p:sp>
-        <p:nvSpPr>
-          <p:cNvPr id="90" name="TextBox 1"/>
+        </p:spPr>
+      </p:pic>
+      <p:sp>
+        <p:nvSpPr>
+          <p:cNvPr id="94" name="가로 글상자 93"/>
           <p:cNvSpPr txBox="1"/>
           <p:nvPr/>
         </p:nvSpPr>
         <p:spPr>
           <a:xfrm>
-            <a:off x="9316166" y="1301432"/>
-            <a:ext cx="1965269" cy="668338"/>
+            <a:off x="6814413" y="389444"/>
+            <a:ext cx="1570435" cy="371732"/>
           </a:xfrm>
           <a:prstGeom prst="rect">
             <a:avLst/>
@@ -7641,70 +7580,46 @@
           </a:bodyPr>
           <a:lstStyle/>
           <a:p>
-            <a:pPr lvl="0">
-              <a:defRPr/>
-            </a:pPr>
-            <a:r>
-              <a:rPr lang="ko-KR" altLang="en-US" sz="1900">
-                <a:latin typeface="충북대70주년체 Regular"/>
-                <a:ea typeface="충북대70주년체 Regular"/>
-              </a:rPr>
-              <a:t>글꼴</a:t>
-            </a:r>
-            <a:endParaRPr lang="ko-KR" altLang="en-US" sz="1900">
+            <a:pPr lvl="0" algn="r">
+              <a:defRPr/>
+            </a:pPr>
+            <a:r>
+              <a:rPr lang="ko-KR" altLang="en-US" sz="1900" b="1">
+                <a:solidFill>
+                  <a:srgbClr val="ecedf1"/>
+                </a:solidFill>
+                <a:latin typeface="충북대70주년체 Regular"/>
+                <a:ea typeface="충북대70주년체 Regular"/>
+              </a:rPr>
+              <a:t>개요</a:t>
+            </a:r>
+            <a:endParaRPr lang="ko-KR" altLang="en-US" sz="1900" b="1">
+              <a:solidFill>
+                <a:srgbClr val="ecedf1"/>
+              </a:solidFill>
               <a:latin typeface="충북대70주년체 Regular"/>
               <a:ea typeface="충북대70주년체 Regular"/>
             </a:endParaRPr>
           </a:p>
-          <a:p>
-            <a:pPr lvl="0">
-              <a:defRPr/>
-            </a:pPr>
-            <a:r>
-              <a:rPr lang="ko-KR" altLang="en-US" sz="1900">
-                <a:latin typeface="충북대70주년체 Regular"/>
-                <a:ea typeface="충북대70주년체 Regular"/>
-              </a:rPr>
-              <a:t>충북대</a:t>
-            </a:r>
-            <a:r>
-              <a:rPr lang="en-US" altLang="ko-KR" sz="1900">
-                <a:latin typeface="충북대70주년체 Regular"/>
-                <a:ea typeface="충북대70주년체 Regular"/>
-              </a:rPr>
-              <a:t>70</a:t>
-            </a:r>
-            <a:r>
-              <a:rPr lang="ko-KR" altLang="en-US" sz="1900">
-                <a:latin typeface="충북대70주년체 Regular"/>
-                <a:ea typeface="충북대70주년체 Regular"/>
-              </a:rPr>
-              <a:t>주년체</a:t>
-            </a:r>
-            <a:endParaRPr lang="ko-KR" altLang="en-US" sz="1900">
-              <a:latin typeface="충북대70주년체 Regular"/>
-              <a:ea typeface="충북대70주년체 Regular"/>
-            </a:endParaRPr>
-          </a:p>
         </p:txBody>
       </p:sp>
       <p:cxnSp>
         <p:nvCxnSpPr>
-          <p:cNvPr id="91" name="선 90"/>
+          <p:cNvPr id="97" name="선 96"/>
           <p:cNvCxnSpPr/>
           <p:nvPr/>
         </p:nvCxnSpPr>
         <p:spPr>
-          <a:xfrm rot="16200000" flipH="1" flipV="1">
-            <a:off x="110942" y="3960321"/>
-            <a:ext cx="4495885" cy="0"/>
+          <a:xfrm>
+            <a:off x="560746" y="1009053"/>
+            <a:ext cx="4993283" cy="1"/>
           </a:xfrm>
           <a:prstGeom prst="line">
             <a:avLst/>
           </a:prstGeom>
-          <a:ln w="25400">
+          <a:ln w="50800">
             <a:solidFill>
-              <a:srgbClr val="767779"/>
+              <a:srgbClr val="496f78"/>
             </a:solidFill>
           </a:ln>
         </p:spPr>
@@ -7768,8 +7683,8 @@
         </p:nvSpPr>
         <p:spPr>
           <a:xfrm>
-            <a:off x="577813" y="3742116"/>
-            <a:ext cx="1570433" cy="299913"/>
+            <a:off x="577811" y="4088085"/>
+            <a:ext cx="1898758" cy="545754"/>
           </a:xfrm>
           <a:prstGeom prst="rect">
             <a:avLst/>
@@ -7786,36 +7701,16 @@
               <a:defRPr/>
             </a:pPr>
             <a:r>
-              <a:rPr lang="en-US" altLang="ko-KR" sz="1400" b="1">
+              <a:rPr lang="ko-KR" altLang="en-US" sz="1900" b="1">
                 <a:solidFill>
                   <a:srgbClr val="ecedf1"/>
                 </a:solidFill>
                 <a:latin typeface="충북대70주년체 Regular"/>
                 <a:ea typeface="충북대70주년체 Regular"/>
               </a:rPr>
-              <a:t>[</a:t>
-            </a:r>
-            <a:r>
-              <a:rPr lang="ko-KR" altLang="en-US" sz="1400" b="1">
-                <a:solidFill>
-                  <a:srgbClr val="ecedf1"/>
-                </a:solidFill>
-                <a:latin typeface="충북대70주년체 Regular"/>
-                <a:ea typeface="충북대70주년체 Regular"/>
-              </a:rPr>
               <a:t>이야기 목적</a:t>
             </a:r>
-            <a:r>
-              <a:rPr lang="en-US" altLang="ko-KR" sz="1400" b="1">
-                <a:solidFill>
-                  <a:srgbClr val="ecedf1"/>
-                </a:solidFill>
-                <a:latin typeface="충북대70주년체 Regular"/>
-                <a:ea typeface="충북대70주년체 Regular"/>
-              </a:rPr>
-              <a:t>]</a:t>
-            </a:r>
-            <a:endParaRPr lang="en-US" altLang="ko-KR" sz="1400" b="1">
+            <a:endParaRPr lang="ko-KR" altLang="en-US" sz="1900" b="1">
               <a:solidFill>
                 <a:srgbClr val="ecedf1"/>
               </a:solidFill>
@@ -7823,6 +7718,28 @@
               <a:ea typeface="충북대70주년체 Regular"/>
             </a:endParaRPr>
           </a:p>
+          <a:p>
+            <a:pPr lvl="0">
+              <a:defRPr/>
+            </a:pPr>
+            <a:r>
+              <a:rPr lang="en-US" altLang="ko-KR" sz="1100" b="1">
+                <a:solidFill>
+                  <a:srgbClr val="767779"/>
+                </a:solidFill>
+                <a:latin typeface="충북대70주년체 Regular"/>
+                <a:ea typeface="충북대70주년체 Regular"/>
+              </a:rPr>
+              <a:t>Narrative Goal</a:t>
+            </a:r>
+            <a:endParaRPr lang="en-US" altLang="ko-KR" sz="1100" b="1">
+              <a:solidFill>
+                <a:srgbClr val="767779"/>
+              </a:solidFill>
+              <a:latin typeface="충북대70주년체 Regular"/>
+              <a:ea typeface="충북대70주년체 Regular"/>
+            </a:endParaRPr>
+          </a:p>
         </p:txBody>
       </p:sp>
       <p:sp>
@@ -7889,8 +7806,8 @@
         </p:nvSpPr>
         <p:spPr>
           <a:xfrm>
-            <a:off x="2195870" y="3742116"/>
-            <a:ext cx="6146384" cy="685104"/>
+            <a:off x="2789805" y="4088085"/>
+            <a:ext cx="5721423" cy="688629"/>
           </a:xfrm>
           <a:prstGeom prst="rect">
             <a:avLst/>
@@ -8047,8 +7964,8 @@
         </p:nvSpPr>
         <p:spPr>
           <a:xfrm>
-            <a:off x="2195869" y="4855845"/>
-            <a:ext cx="6146387" cy="486091"/>
+            <a:off x="2789804" y="5324929"/>
+            <a:ext cx="5721426" cy="487377"/>
           </a:xfrm>
           <a:prstGeom prst="rect">
             <a:avLst/>
@@ -8180,8 +8097,8 @@
         </p:nvSpPr>
         <p:spPr>
           <a:xfrm>
-            <a:off x="577813" y="4855845"/>
-            <a:ext cx="1296592" cy="298466"/>
+            <a:off x="577810" y="5324929"/>
+            <a:ext cx="1567663" cy="544527"/>
           </a:xfrm>
           <a:prstGeom prst="rect">
             <a:avLst/>
@@ -8198,36 +8115,16 @@
               <a:defRPr/>
             </a:pPr>
             <a:r>
-              <a:rPr lang="en-US" altLang="ko-KR" sz="1400" b="1">
+              <a:rPr lang="ko-KR" altLang="en-US" sz="1900" b="1">
                 <a:solidFill>
                   <a:srgbClr val="ecedf1"/>
                 </a:solidFill>
                 <a:latin typeface="충북대70주년체 Regular"/>
                 <a:ea typeface="충북대70주년체 Regular"/>
               </a:rPr>
-              <a:t>[</a:t>
-            </a:r>
-            <a:r>
-              <a:rPr lang="ko-KR" altLang="en-US" sz="1400" b="1">
-                <a:solidFill>
-                  <a:srgbClr val="ecedf1"/>
-                </a:solidFill>
-                <a:latin typeface="충북대70주년체 Regular"/>
-                <a:ea typeface="충북대70주년체 Regular"/>
-              </a:rPr>
               <a:t>플레이 목적</a:t>
             </a:r>
-            <a:r>
-              <a:rPr lang="en-US" altLang="ko-KR" sz="1400" b="1">
-                <a:solidFill>
-                  <a:srgbClr val="ecedf1"/>
-                </a:solidFill>
-                <a:latin typeface="충북대70주년체 Regular"/>
-                <a:ea typeface="충북대70주년체 Regular"/>
-              </a:rPr>
-              <a:t>]</a:t>
-            </a:r>
-            <a:endParaRPr lang="en-US" altLang="ko-KR" sz="1400" b="1">
+            <a:endParaRPr lang="ko-KR" altLang="en-US" sz="1900" b="1">
               <a:solidFill>
                 <a:srgbClr val="ecedf1"/>
               </a:solidFill>
@@ -8235,30 +8132,741 @@
               <a:ea typeface="충북대70주년체 Regular"/>
             </a:endParaRPr>
           </a:p>
-        </p:txBody>
-      </p:sp>
-      <p:sp>
-        <p:nvSpPr>
-          <p:cNvPr id="51" name="사각형 설명선 50"/>
-          <p:cNvSpPr/>
+          <a:p>
+            <a:pPr lvl="0">
+              <a:defRPr/>
+            </a:pPr>
+            <a:r>
+              <a:rPr lang="en-US" altLang="ko-KR" sz="1100" b="1">
+                <a:solidFill>
+                  <a:srgbClr val="767779"/>
+                </a:solidFill>
+                <a:latin typeface="충북대70주년체 Regular"/>
+                <a:ea typeface="충북대70주년체 Regular"/>
+              </a:rPr>
+              <a:t>Player Goal</a:t>
+            </a:r>
+            <a:endParaRPr lang="en-US" altLang="ko-KR" sz="1100" b="1">
+              <a:solidFill>
+                <a:srgbClr val="767779"/>
+              </a:solidFill>
+              <a:latin typeface="충북대70주년체 Regular"/>
+              <a:ea typeface="충북대70주년체 Regular"/>
+            </a:endParaRPr>
+          </a:p>
+        </p:txBody>
+      </p:sp>
+      <p:sp>
+        <p:nvSpPr>
+          <p:cNvPr id="56" name="가로 글상자 55"/>
+          <p:cNvSpPr txBox="1"/>
           <p:nvPr/>
         </p:nvSpPr>
         <p:spPr>
           <a:xfrm>
-            <a:off x="2148247" y="3742117"/>
-            <a:ext cx="6194008" cy="685103"/>
-          </a:xfrm>
-          <a:prstGeom prst="wedgeRectCallout">
-            <a:avLst>
-              <a:gd name="adj1" fmla="val -51936"/>
-              <a:gd name="adj2" fmla="val -19421"/>
-            </a:avLst>
+            <a:off x="577812" y="2884392"/>
+            <a:ext cx="1898758" cy="544608"/>
+          </a:xfrm>
+          <a:prstGeom prst="rect">
+            <a:avLst/>
           </a:prstGeom>
           <a:noFill/>
-          <a:ln>
+        </p:spPr>
+        <p:txBody>
+          <a:bodyPr wrap="square">
+            <a:spAutoFit/>
+          </a:bodyPr>
+          <a:lstStyle/>
+          <a:p>
+            <a:pPr lvl="0">
+              <a:defRPr/>
+            </a:pPr>
+            <a:r>
+              <a:rPr lang="ko-KR" altLang="en-US" sz="1900" b="1">
+                <a:solidFill>
+                  <a:srgbClr val="ecedf1"/>
+                </a:solidFill>
+                <a:latin typeface="충북대70주년체 Regular"/>
+                <a:ea typeface="충북대70주년체 Regular"/>
+              </a:rPr>
+              <a:t>방해 요인</a:t>
+            </a:r>
+            <a:endParaRPr lang="ko-KR" altLang="en-US" sz="1900" b="1">
+              <a:solidFill>
+                <a:srgbClr val="ecedf1"/>
+              </a:solidFill>
+              <a:latin typeface="충북대70주년체 Regular"/>
+              <a:ea typeface="충북대70주년체 Regular"/>
+            </a:endParaRPr>
+          </a:p>
+          <a:p>
+            <a:pPr lvl="0">
+              <a:defRPr/>
+            </a:pPr>
+            <a:r>
+              <a:rPr lang="en-US" altLang="ko-KR" sz="1100" b="1">
+                <a:solidFill>
+                  <a:srgbClr val="767779"/>
+                </a:solidFill>
+                <a:latin typeface="충북대70주년체 Regular"/>
+                <a:ea typeface="충북대70주년체 Regular"/>
+              </a:rPr>
+              <a:t>Obstacles</a:t>
+            </a:r>
+            <a:endParaRPr lang="en-US" altLang="ko-KR" sz="1100" b="1">
+              <a:solidFill>
+                <a:srgbClr val="767779"/>
+              </a:solidFill>
+              <a:latin typeface="충북대70주년체 Regular"/>
+              <a:ea typeface="충북대70주년체 Regular"/>
+            </a:endParaRPr>
+          </a:p>
+        </p:txBody>
+      </p:sp>
+      <p:sp>
+        <p:nvSpPr>
+          <p:cNvPr id="58" name="가로 글상자 57"/>
+          <p:cNvSpPr txBox="1"/>
+          <p:nvPr/>
+        </p:nvSpPr>
+        <p:spPr>
+          <a:xfrm>
+            <a:off x="2789800" y="2884392"/>
+            <a:ext cx="5721428" cy="687484"/>
+          </a:xfrm>
+          <a:prstGeom prst="rect">
+            <a:avLst/>
+          </a:prstGeom>
+          <a:noFill/>
+        </p:spPr>
+        <p:txBody>
+          <a:bodyPr wrap="square">
+            <a:spAutoFit/>
+          </a:bodyPr>
+          <a:lstStyle/>
+          <a:p>
+            <a:pPr lvl="0">
+              <a:lnSpc>
+                <a:spcPct val="120000"/>
+              </a:lnSpc>
+              <a:defRPr/>
+            </a:pPr>
+            <a:r>
+              <a:rPr lang="ko-KR" altLang="en-US" sz="1100" b="1" spc="100">
+                <a:solidFill>
+                  <a:srgbClr val="eb657e"/>
+                </a:solidFill>
+                <a:latin typeface="충북대70주년체 Regular"/>
+                <a:ea typeface="충북대70주년체 Regular"/>
+              </a:rPr>
+              <a:t>몬스터와 퍼즐</a:t>
+            </a:r>
+            <a:r>
+              <a:rPr lang="ko-KR" altLang="en-US" sz="1100" b="1" spc="100">
+                <a:solidFill>
+                  <a:srgbClr val="767779"/>
+                </a:solidFill>
+                <a:latin typeface="충북대70주년체 Regular"/>
+                <a:ea typeface="충북대70주년체 Regular"/>
+              </a:rPr>
+              <a:t>이 물리적인 장애로 등장하며</a:t>
+            </a:r>
+            <a:r>
+              <a:rPr lang="en-US" altLang="ko-KR" sz="1100" b="1" spc="100">
+                <a:solidFill>
+                  <a:srgbClr val="767779"/>
+                </a:solidFill>
+                <a:latin typeface="충북대70주년체 Regular"/>
+                <a:ea typeface="충북대70주년체 Regular"/>
+              </a:rPr>
+              <a:t>,</a:t>
+            </a:r>
+            <a:endParaRPr lang="en-US" altLang="ko-KR" sz="1100" b="1" spc="100">
+              <a:solidFill>
+                <a:srgbClr val="767779"/>
+              </a:solidFill>
+              <a:latin typeface="충북대70주년체 Regular"/>
+              <a:ea typeface="충북대70주년체 Regular"/>
+            </a:endParaRPr>
+          </a:p>
+          <a:p>
+            <a:pPr lvl="0">
+              <a:lnSpc>
+                <a:spcPct val="120000"/>
+              </a:lnSpc>
+              <a:defRPr/>
+            </a:pPr>
+            <a:r>
+              <a:rPr lang="ko-KR" altLang="en-US" sz="1100" b="1" spc="100">
+                <a:solidFill>
+                  <a:srgbClr val="767779"/>
+                </a:solidFill>
+                <a:latin typeface="충북대70주년체 Regular"/>
+                <a:ea typeface="충북대70주년체 Regular"/>
+              </a:rPr>
+              <a:t>동시에 </a:t>
+            </a:r>
+            <a:r>
+              <a:rPr lang="ko-KR" altLang="en-US" sz="1100" b="1" spc="100">
+                <a:solidFill>
+                  <a:srgbClr val="eb657e"/>
+                </a:solidFill>
+                <a:latin typeface="충북대70주년체 Regular"/>
+                <a:ea typeface="충북대70주년체 Regular"/>
+              </a:rPr>
+              <a:t>주변 인물들의 말과 반복되는 요구</a:t>
+            </a:r>
+            <a:r>
+              <a:rPr lang="ko-KR" altLang="en-US" sz="1100" b="1" spc="100">
+                <a:solidFill>
+                  <a:srgbClr val="767779"/>
+                </a:solidFill>
+                <a:latin typeface="충북대70주년체 Regular"/>
+                <a:ea typeface="충북대70주년체 Regular"/>
+              </a:rPr>
+              <a:t>는 심리적인 압박으로 작용해</a:t>
+            </a:r>
+            <a:r>
+              <a:rPr lang="en-US" altLang="ko-KR" sz="1100" b="1" spc="100">
+                <a:solidFill>
+                  <a:srgbClr val="767779"/>
+                </a:solidFill>
+                <a:latin typeface="충북대70주년체 Regular"/>
+                <a:ea typeface="충북대70주년체 Regular"/>
+              </a:rPr>
+              <a:t>,</a:t>
+            </a:r>
+            <a:endParaRPr lang="en-US" altLang="ko-KR" sz="1100" b="1" spc="100">
+              <a:solidFill>
+                <a:srgbClr val="767779"/>
+              </a:solidFill>
+              <a:latin typeface="충북대70주년체 Regular"/>
+              <a:ea typeface="충북대70주년체 Regular"/>
+            </a:endParaRPr>
+          </a:p>
+          <a:p>
+            <a:pPr lvl="0">
+              <a:lnSpc>
+                <a:spcPct val="120000"/>
+              </a:lnSpc>
+              <a:defRPr/>
+            </a:pPr>
+            <a:r>
+              <a:rPr lang="ko-KR" altLang="en-US" sz="1100" b="1" spc="100">
+                <a:solidFill>
+                  <a:srgbClr val="fce891"/>
+                </a:solidFill>
+                <a:latin typeface="충북대70주년체 Regular"/>
+                <a:ea typeface="충북대70주년체 Regular"/>
+              </a:rPr>
+              <a:t>플레이어가 특정한 선택을 하도록 몰아가는 상황</a:t>
+            </a:r>
+            <a:r>
+              <a:rPr lang="ko-KR" altLang="en-US" sz="1100" b="1" spc="100">
+                <a:solidFill>
+                  <a:srgbClr val="767779"/>
+                </a:solidFill>
+                <a:latin typeface="충북대70주년체 Regular"/>
+                <a:ea typeface="충북대70주년체 Regular"/>
+              </a:rPr>
+              <a:t>을 만든다</a:t>
+            </a:r>
+            <a:r>
+              <a:rPr lang="en-US" altLang="ko-KR" sz="1100" b="1" spc="100">
+                <a:solidFill>
+                  <a:srgbClr val="767779"/>
+                </a:solidFill>
+                <a:latin typeface="충북대70주년체 Regular"/>
+                <a:ea typeface="충북대70주년체 Regular"/>
+              </a:rPr>
+              <a:t>.</a:t>
+            </a:r>
+            <a:endParaRPr lang="en-US" altLang="ko-KR" sz="1100" b="1" spc="100">
+              <a:solidFill>
+                <a:srgbClr val="767779"/>
+              </a:solidFill>
+              <a:latin typeface="충북대70주년체 Regular"/>
+              <a:ea typeface="충북대70주년체 Regular"/>
+            </a:endParaRPr>
+          </a:p>
+        </p:txBody>
+      </p:sp>
+      <p:sp>
+        <p:nvSpPr>
+          <p:cNvPr id="59" name="가로 글상자 58"/>
+          <p:cNvSpPr txBox="1"/>
+          <p:nvPr/>
+        </p:nvSpPr>
+        <p:spPr>
+          <a:xfrm>
+            <a:off x="577812" y="1712338"/>
+            <a:ext cx="1898758" cy="543182"/>
+          </a:xfrm>
+          <a:prstGeom prst="rect">
+            <a:avLst/>
+          </a:prstGeom>
+          <a:noFill/>
+        </p:spPr>
+        <p:txBody>
+          <a:bodyPr wrap="square">
+            <a:spAutoFit/>
+          </a:bodyPr>
+          <a:lstStyle/>
+          <a:p>
+            <a:pPr lvl="0">
+              <a:defRPr/>
+            </a:pPr>
+            <a:r>
+              <a:rPr lang="ko-KR" altLang="en-US" sz="1900" b="1">
+                <a:solidFill>
+                  <a:srgbClr val="ecedf1"/>
+                </a:solidFill>
+                <a:latin typeface="충북대70주년체 Regular"/>
+                <a:ea typeface="충북대70주년체 Regular"/>
+              </a:rPr>
+              <a:t>플레이 작용 요소</a:t>
+            </a:r>
+            <a:endParaRPr lang="ko-KR" altLang="en-US" sz="1900" b="1">
+              <a:solidFill>
+                <a:srgbClr val="ecedf1"/>
+              </a:solidFill>
+              <a:latin typeface="충북대70주년체 Regular"/>
+              <a:ea typeface="충북대70주년체 Regular"/>
+            </a:endParaRPr>
+          </a:p>
+          <a:p>
+            <a:pPr lvl="0">
+              <a:defRPr/>
+            </a:pPr>
+            <a:r>
+              <a:rPr lang="en-US" altLang="ko-KR" sz="1100" b="1">
+                <a:solidFill>
+                  <a:srgbClr val="767779"/>
+                </a:solidFill>
+                <a:latin typeface="충북대70주년체 Regular"/>
+                <a:ea typeface="충북대70주년체 Regular"/>
+              </a:rPr>
+              <a:t>Player Actions</a:t>
+            </a:r>
+            <a:endParaRPr lang="en-US" altLang="ko-KR" sz="1100" b="1">
+              <a:solidFill>
+                <a:srgbClr val="767779"/>
+              </a:solidFill>
+              <a:latin typeface="충북대70주년체 Regular"/>
+              <a:ea typeface="충북대70주년체 Regular"/>
+            </a:endParaRPr>
+          </a:p>
+        </p:txBody>
+      </p:sp>
+      <p:sp>
+        <p:nvSpPr>
+          <p:cNvPr id="61" name="가로 글상자 60"/>
+          <p:cNvSpPr txBox="1"/>
+          <p:nvPr/>
+        </p:nvSpPr>
+        <p:spPr>
+          <a:xfrm>
+            <a:off x="2789801" y="1712338"/>
+            <a:ext cx="5721427" cy="686057"/>
+          </a:xfrm>
+          <a:prstGeom prst="rect">
+            <a:avLst/>
+          </a:prstGeom>
+          <a:noFill/>
+        </p:spPr>
+        <p:txBody>
+          <a:bodyPr wrap="square">
+            <a:spAutoFit/>
+          </a:bodyPr>
+          <a:lstStyle/>
+          <a:p>
+            <a:pPr lvl="0">
+              <a:lnSpc>
+                <a:spcPct val="120000"/>
+              </a:lnSpc>
+              <a:defRPr/>
+            </a:pPr>
+            <a:r>
+              <a:rPr lang="ko-KR" altLang="en-US" sz="1100" b="1" spc="100">
+                <a:solidFill>
+                  <a:srgbClr val="767779"/>
+                </a:solidFill>
+                <a:latin typeface="충북대70주년체 Regular"/>
+                <a:ea typeface="충북대70주년체 Regular"/>
+              </a:rPr>
+              <a:t>플레이어는 </a:t>
+            </a:r>
+            <a:r>
+              <a:rPr lang="ko-KR" altLang="en-US" sz="1100" b="1" spc="100">
+                <a:solidFill>
+                  <a:srgbClr val="ecedf1"/>
+                </a:solidFill>
+                <a:latin typeface="충북대70주년체 Regular"/>
+                <a:ea typeface="충북대70주년체 Regular"/>
+              </a:rPr>
+              <a:t>대화와 행동 선택</a:t>
+            </a:r>
+            <a:r>
+              <a:rPr lang="ko-KR" altLang="en-US" sz="1100" b="1" spc="100">
+                <a:solidFill>
+                  <a:srgbClr val="767779"/>
+                </a:solidFill>
+                <a:latin typeface="충북대70주년체 Regular"/>
+                <a:ea typeface="충북대70주년체 Regular"/>
+              </a:rPr>
+              <a:t>을 통해 상황에 개입한다</a:t>
+            </a:r>
+            <a:r>
+              <a:rPr lang="en-US" altLang="ko-KR" sz="1100" b="1" spc="100">
+                <a:solidFill>
+                  <a:srgbClr val="767779"/>
+                </a:solidFill>
+                <a:latin typeface="충북대70주년체 Regular"/>
+                <a:ea typeface="충북대70주년체 Regular"/>
+              </a:rPr>
+              <a:t>.</a:t>
+            </a:r>
+            <a:endParaRPr lang="en-US" altLang="ko-KR" sz="1100" b="1" spc="100">
+              <a:solidFill>
+                <a:srgbClr val="767779"/>
+              </a:solidFill>
+              <a:latin typeface="충북대70주년체 Regular"/>
+              <a:ea typeface="충북대70주년체 Regular"/>
+            </a:endParaRPr>
+          </a:p>
+          <a:p>
+            <a:pPr lvl="0">
+              <a:lnSpc>
+                <a:spcPct val="120000"/>
+              </a:lnSpc>
+              <a:defRPr/>
+            </a:pPr>
+            <a:r>
+              <a:rPr lang="ko-KR" altLang="en-US" sz="1100" b="1" spc="100">
+                <a:solidFill>
+                  <a:srgbClr val="767779"/>
+                </a:solidFill>
+                <a:latin typeface="충북대70주년체 Regular"/>
+                <a:ea typeface="충북대70주년체 Regular"/>
+              </a:rPr>
+              <a:t>선택은 즉각적인 결과뿐 아니라 </a:t>
+            </a:r>
+            <a:r>
+              <a:rPr lang="ko-KR" altLang="en-US" sz="1100" b="1" spc="100">
+                <a:solidFill>
+                  <a:srgbClr val="ecedf1"/>
+                </a:solidFill>
+                <a:latin typeface="충북대70주년체 Regular"/>
+                <a:ea typeface="충북대70주년체 Regular"/>
+              </a:rPr>
+              <a:t>이후 전개과 선택지 구성에 누적된 영향</a:t>
+            </a:r>
+            <a:r>
+              <a:rPr lang="ko-KR" altLang="en-US" sz="1100" b="1" spc="100">
+                <a:solidFill>
+                  <a:srgbClr val="767779"/>
+                </a:solidFill>
+                <a:latin typeface="충북대70주년체 Regular"/>
+                <a:ea typeface="충북대70주년체 Regular"/>
+              </a:rPr>
+              <a:t>을 미치며</a:t>
+            </a:r>
+            <a:r>
+              <a:rPr lang="en-US" altLang="ko-KR" sz="1100" b="1" spc="100">
+                <a:solidFill>
+                  <a:srgbClr val="767779"/>
+                </a:solidFill>
+                <a:latin typeface="충북대70주년체 Regular"/>
+                <a:ea typeface="충북대70주년체 Regular"/>
+              </a:rPr>
+              <a:t>,</a:t>
+            </a:r>
+            <a:endParaRPr lang="en-US" altLang="ko-KR" sz="1100" b="1" spc="100">
+              <a:solidFill>
+                <a:srgbClr val="767779"/>
+              </a:solidFill>
+              <a:latin typeface="충북대70주년체 Regular"/>
+              <a:ea typeface="충북대70주년체 Regular"/>
+            </a:endParaRPr>
+          </a:p>
+          <a:p>
+            <a:pPr lvl="0">
+              <a:lnSpc>
+                <a:spcPct val="120000"/>
+              </a:lnSpc>
+              <a:defRPr/>
+            </a:pPr>
+            <a:r>
+              <a:rPr lang="ko-KR" altLang="en-US" sz="1100" b="1" spc="100">
+                <a:solidFill>
+                  <a:srgbClr val="767779"/>
+                </a:solidFill>
+                <a:latin typeface="충북대70주년체 Regular"/>
+                <a:ea typeface="충북대70주년체 Regular"/>
+              </a:rPr>
+              <a:t>주인공이 주변의 기대에 어떻게 반응해 왔는 지를 드러낸다</a:t>
+            </a:r>
+            <a:r>
+              <a:rPr lang="en-US" altLang="ko-KR" sz="1100" b="1" spc="100">
+                <a:solidFill>
+                  <a:srgbClr val="767779"/>
+                </a:solidFill>
+                <a:latin typeface="충북대70주년체 Regular"/>
+                <a:ea typeface="충북대70주년체 Regular"/>
+              </a:rPr>
+              <a:t>.</a:t>
+            </a:r>
+            <a:endParaRPr lang="en-US" altLang="ko-KR" sz="1100" b="1" spc="100">
+              <a:solidFill>
+                <a:srgbClr val="767779"/>
+              </a:solidFill>
+              <a:latin typeface="충북대70주년체 Regular"/>
+              <a:ea typeface="충북대70주년체 Regular"/>
+            </a:endParaRPr>
+          </a:p>
+        </p:txBody>
+      </p:sp>
+      <p:sp>
+        <p:nvSpPr>
+          <p:cNvPr id="91" name="가로 글상자 90"/>
+          <p:cNvSpPr txBox="1"/>
+          <p:nvPr/>
+        </p:nvSpPr>
+        <p:spPr>
+          <a:xfrm>
+            <a:off x="509586" y="294858"/>
+            <a:ext cx="3933968" cy="617637"/>
+          </a:xfrm>
+          <a:prstGeom prst="rect">
+            <a:avLst/>
+          </a:prstGeom>
+          <a:noFill/>
+        </p:spPr>
+        <p:txBody>
+          <a:bodyPr wrap="square">
+            <a:spAutoFit/>
+          </a:bodyPr>
+          <a:lstStyle/>
+          <a:p>
+            <a:pPr lvl="0">
+              <a:defRPr/>
+            </a:pPr>
+            <a:endParaRPr lang="ko-KR" altLang="en-US" sz="3500" b="1">
+              <a:solidFill>
+                <a:srgbClr val="ecedf1"/>
+              </a:solidFill>
+              <a:latin typeface="충북대70주년체 Regular"/>
+              <a:ea typeface="충북대70주년체 Regular"/>
+            </a:endParaRPr>
+          </a:p>
+        </p:txBody>
+      </p:sp>
+      <p:sp>
+        <p:nvSpPr>
+          <p:cNvPr id="96" name="가로 글상자 95"/>
+          <p:cNvSpPr txBox="1"/>
+          <p:nvPr/>
+        </p:nvSpPr>
+        <p:spPr>
+          <a:xfrm>
+            <a:off x="509586" y="391416"/>
+            <a:ext cx="3933968" cy="617637"/>
+          </a:xfrm>
+          <a:prstGeom prst="rect">
+            <a:avLst/>
+          </a:prstGeom>
+          <a:noFill/>
+        </p:spPr>
+        <p:txBody>
+          <a:bodyPr wrap="square">
+            <a:spAutoFit/>
+          </a:bodyPr>
+          <a:lstStyle/>
+          <a:p>
+            <a:pPr lvl="0">
+              <a:defRPr/>
+            </a:pPr>
+            <a:r>
+              <a:rPr lang="ko-KR" altLang="en-US" sz="3500" b="1">
+                <a:solidFill>
+                  <a:srgbClr val="ecedf1"/>
+                </a:solidFill>
+                <a:latin typeface="충북대70주년체 Regular"/>
+                <a:ea typeface="충북대70주년체 Regular"/>
+              </a:rPr>
+              <a:t>게임의 정의</a:t>
+            </a:r>
+            <a:endParaRPr lang="en-US" altLang="ko-KR" sz="3500" b="1">
+              <a:solidFill>
+                <a:srgbClr val="ecedf1"/>
+              </a:solidFill>
+              <a:latin typeface="충북대70주년체 Regular"/>
+              <a:ea typeface="충북대70주년체 Regular"/>
+            </a:endParaRPr>
+          </a:p>
+        </p:txBody>
+      </p:sp>
+      <p:cxnSp>
+        <p:nvCxnSpPr>
+          <p:cNvPr id="97" name="선 96"/>
+          <p:cNvCxnSpPr/>
+          <p:nvPr/>
+        </p:nvCxnSpPr>
+        <p:spPr>
+          <a:xfrm>
+            <a:off x="560746" y="1009053"/>
+            <a:ext cx="4993283" cy="1"/>
+          </a:xfrm>
+          <a:prstGeom prst="line">
+            <a:avLst/>
+          </a:prstGeom>
+          <a:ln w="50800">
+            <a:solidFill>
+              <a:srgbClr val="496f78"/>
+            </a:solidFill>
+          </a:ln>
+        </p:spPr>
+        <p:style>
+          <a:lnRef idx="1">
+            <a:schemeClr val="accent1"/>
+          </a:lnRef>
+          <a:fillRef idx="0">
+            <a:schemeClr val="accent1"/>
+          </a:fillRef>
+          <a:effectRef idx="0">
+            <a:schemeClr val="accent1"/>
+          </a:effectRef>
+          <a:fontRef idx="minor">
+            <a:schemeClr val="tx1"/>
+          </a:fontRef>
+        </p:style>
+      </p:cxnSp>
+      <p:cxnSp>
+        <p:nvCxnSpPr>
+          <p:cNvPr id="98" name="선 97"/>
+          <p:cNvCxnSpPr/>
+          <p:nvPr/>
+        </p:nvCxnSpPr>
+        <p:spPr>
+          <a:xfrm rot="16200000" flipH="1" flipV="1">
+            <a:off x="228628" y="3960321"/>
+            <a:ext cx="4495885" cy="0"/>
+          </a:xfrm>
+          <a:prstGeom prst="line">
+            <a:avLst/>
+          </a:prstGeom>
+          <a:ln w="25400">
             <a:solidFill>
               <a:srgbClr val="767779"/>
             </a:solidFill>
+          </a:ln>
+        </p:spPr>
+        <p:style>
+          <a:lnRef idx="1">
+            <a:schemeClr val="accent1"/>
+          </a:lnRef>
+          <a:fillRef idx="0">
+            <a:schemeClr val="accent1"/>
+          </a:fillRef>
+          <a:effectRef idx="0">
+            <a:schemeClr val="accent1"/>
+          </a:effectRef>
+          <a:fontRef idx="minor">
+            <a:schemeClr val="tx1"/>
+          </a:fontRef>
+        </p:style>
+      </p:cxnSp>
+      <p:pic>
+        <p:nvPicPr>
+          <p:cNvPr id="99" name="그림 98"/>
+          <p:cNvPicPr>
+            <a:picLocks noChangeAspect="1"/>
+          </p:cNvPicPr>
+          <p:nvPr/>
+        </p:nvPicPr>
+        <p:blipFill rotWithShape="1">
+          <a:blip r:embed="rId3"/>
+          <a:srcRect l="12970" t="64590" r="70450" b="3750"/>
+          <a:stretch>
+            <a:fillRect/>
+          </a:stretch>
+        </p:blipFill>
+        <p:spPr>
+          <a:xfrm flipH="1">
+            <a:off x="8476478" y="238648"/>
+            <a:ext cx="352522" cy="673322"/>
+          </a:xfrm>
+          <a:prstGeom prst="rect">
+            <a:avLst/>
+          </a:prstGeom>
+        </p:spPr>
+      </p:pic>
+      <p:sp>
+        <p:nvSpPr>
+          <p:cNvPr id="100" name="가로 글상자 99"/>
+          <p:cNvSpPr txBox="1"/>
+          <p:nvPr/>
+        </p:nvSpPr>
+        <p:spPr>
+          <a:xfrm>
+            <a:off x="6814413" y="389444"/>
+            <a:ext cx="1570435" cy="371732"/>
+          </a:xfrm>
+          <a:prstGeom prst="rect">
+            <a:avLst/>
+          </a:prstGeom>
+          <a:noFill/>
+        </p:spPr>
+        <p:txBody>
+          <a:bodyPr wrap="square">
+            <a:spAutoFit/>
+          </a:bodyPr>
+          <a:lstStyle/>
+          <a:p>
+            <a:pPr lvl="0" algn="r">
+              <a:defRPr/>
+            </a:pPr>
+            <a:r>
+              <a:rPr lang="ko-KR" altLang="en-US" sz="1900" b="1">
+                <a:solidFill>
+                  <a:srgbClr val="ecedf1"/>
+                </a:solidFill>
+                <a:latin typeface="충북대70주년체 Regular"/>
+                <a:ea typeface="충북대70주년체 Regular"/>
+              </a:rPr>
+              <a:t>개요</a:t>
+            </a:r>
+            <a:endParaRPr lang="ko-KR" altLang="en-US" sz="1900" b="1">
+              <a:solidFill>
+                <a:srgbClr val="ecedf1"/>
+              </a:solidFill>
+              <a:latin typeface="충북대70주년체 Regular"/>
+              <a:ea typeface="충북대70주년체 Regular"/>
+            </a:endParaRPr>
+          </a:p>
+        </p:txBody>
+      </p:sp>
+      <p:sp>
+        <p:nvSpPr>
+          <p:cNvPr id="101" name="타원 100"/>
+          <p:cNvSpPr>
+            <a:spLocks noChangeAspect="1"/>
+          </p:cNvSpPr>
+          <p:nvPr/>
+        </p:nvSpPr>
+        <p:spPr>
+          <a:xfrm>
+            <a:off x="9531736" y="6344936"/>
+            <a:ext cx="513064" cy="513064"/>
+          </a:xfrm>
+          <a:prstGeom prst="ellipse">
+            <a:avLst/>
+          </a:prstGeom>
+          <a:solidFill>
+            <a:srgbClr val="ecedf1"/>
+          </a:solidFill>
+          <a:ln>
+            <a:noFill/>
           </a:ln>
         </p:spPr>
         <p:style>
@@ -8279,6 +8887,7 @@
         </p:style>
         <p:txBody>
           <a:bodyPr anchor="ctr"/>
+          <a:lstStyle/>
           <a:p>
             <a:pPr lvl="0" algn="ctr">
               <a:defRPr/>
@@ -8289,26 +8898,133 @@
       </p:sp>
       <p:sp>
         <p:nvSpPr>
-          <p:cNvPr id="54" name="사각형 설명선 53"/>
-          <p:cNvSpPr/>
+          <p:cNvPr id="102" name="TextBox 1"/>
+          <p:cNvSpPr txBox="1"/>
           <p:nvPr/>
         </p:nvSpPr>
         <p:spPr>
           <a:xfrm>
-            <a:off x="2148247" y="4855845"/>
-            <a:ext cx="6194008" cy="486091"/>
-          </a:xfrm>
-          <a:prstGeom prst="wedgeRectCallout">
-            <a:avLst>
-              <a:gd name="adj1" fmla="val -52448"/>
-              <a:gd name="adj2" fmla="val -20445"/>
-            </a:avLst>
+            <a:off x="9316166" y="0"/>
+            <a:ext cx="1457269" cy="1150620"/>
+          </a:xfrm>
+          <a:prstGeom prst="rect">
+            <a:avLst/>
           </a:prstGeom>
           <a:noFill/>
+        </p:spPr>
+        <p:txBody>
+          <a:bodyPr wrap="square">
+            <a:spAutoFit/>
+          </a:bodyPr>
+          <a:lstStyle/>
+          <a:p>
+            <a:pPr lvl="0">
+              <a:defRPr/>
+            </a:pPr>
+            <a:r>
+              <a:rPr lang="ko-KR" altLang="en-US" sz="1900">
+                <a:latin typeface="충북대70주년체 Regular"/>
+                <a:ea typeface="충북대70주년체 Regular"/>
+              </a:rPr>
+              <a:t>글자 크기</a:t>
+            </a:r>
+            <a:endParaRPr lang="ko-KR" altLang="en-US" sz="1900">
+              <a:latin typeface="충북대70주년체 Regular"/>
+              <a:ea typeface="충북대70주년체 Regular"/>
+            </a:endParaRPr>
+          </a:p>
+          <a:p>
+            <a:pPr lvl="0">
+              <a:defRPr/>
+            </a:pPr>
+            <a:r>
+              <a:rPr lang="ko-KR" altLang="en-US" sz="2600">
+                <a:latin typeface="충북대70주년체 Regular"/>
+                <a:ea typeface="충북대70주년체 Regular"/>
+              </a:rPr>
+              <a:t>ㄱ </a:t>
+            </a:r>
+            <a:r>
+              <a:rPr lang="en-US" altLang="ko-KR" sz="2600">
+                <a:latin typeface="충북대70주년체 Regular"/>
+                <a:ea typeface="충북대70주년체 Regular"/>
+              </a:rPr>
+              <a:t>(35)</a:t>
+            </a:r>
+            <a:endParaRPr lang="en-US" altLang="ko-KR" sz="2600">
+              <a:latin typeface="충북대70주년체 Regular"/>
+              <a:ea typeface="충북대70주년체 Regular"/>
+            </a:endParaRPr>
+          </a:p>
+          <a:p>
+            <a:pPr lvl="0">
+              <a:defRPr/>
+            </a:pPr>
+            <a:r>
+              <a:rPr lang="ko-KR" altLang="en-US" sz="1400">
+                <a:latin typeface="충북대70주년체 Regular"/>
+                <a:ea typeface="충북대70주년체 Regular"/>
+              </a:rPr>
+              <a:t>ㄱ </a:t>
+            </a:r>
+            <a:r>
+              <a:rPr lang="en-US" altLang="ko-KR" sz="1400">
+                <a:latin typeface="충북대70주년체 Regular"/>
+                <a:ea typeface="충북대70주년체 Regular"/>
+              </a:rPr>
+              <a:t>(19)</a:t>
+            </a:r>
+            <a:endParaRPr lang="en-US" altLang="ko-KR" sz="1400">
+              <a:latin typeface="충북대70주년체 Regular"/>
+              <a:ea typeface="충북대70주년체 Regular"/>
+            </a:endParaRPr>
+          </a:p>
+          <a:p>
+            <a:pPr lvl="0">
+              <a:defRPr/>
+            </a:pPr>
+            <a:r>
+              <a:rPr lang="ko-KR" altLang="en-US" sz="1100">
+                <a:latin typeface="충북대70주년체 Regular"/>
+                <a:ea typeface="충북대70주년체 Regular"/>
+              </a:rPr>
+              <a:t>ㄱ </a:t>
+            </a:r>
+            <a:r>
+              <a:rPr lang="en-US" altLang="ko-KR" sz="1100">
+                <a:latin typeface="충북대70주년체 Regular"/>
+                <a:ea typeface="충북대70주년체 Regular"/>
+              </a:rPr>
+              <a:t>(11)</a:t>
+            </a:r>
+            <a:endParaRPr lang="en-US" altLang="ko-KR" sz="1100">
+              <a:latin typeface="충북대70주년체 Regular"/>
+              <a:ea typeface="충북대70주년체 Regular"/>
+            </a:endParaRPr>
+          </a:p>
+        </p:txBody>
+      </p:sp>
+      <p:sp>
+        <p:nvSpPr>
+          <p:cNvPr id="103" name="타원 102"/>
+          <p:cNvSpPr>
+            <a:spLocks noChangeAspect="1"/>
+          </p:cNvSpPr>
+          <p:nvPr/>
+        </p:nvSpPr>
+        <p:spPr>
+          <a:xfrm>
+            <a:off x="9531736" y="2188448"/>
+            <a:ext cx="513064" cy="513064"/>
+          </a:xfrm>
+          <a:prstGeom prst="ellipse">
+            <a:avLst/>
+          </a:prstGeom>
+          <a:solidFill>
+            <a:srgbClr val="eb657e"/>
+          </a:solidFill>
           <a:ln>
-            <a:solidFill>
-              <a:srgbClr val="767779"/>
-            </a:solidFill>
+            <a:noFill/>
           </a:ln>
         </p:spPr>
         <p:style>
@@ -8340,91 +9056,25 @@
       </p:sp>
       <p:sp>
         <p:nvSpPr>
-          <p:cNvPr id="56" name="가로 글상자 55"/>
-          <p:cNvSpPr txBox="1"/>
+          <p:cNvPr id="104" name="타원 103"/>
+          <p:cNvSpPr>
+            <a:spLocks noChangeAspect="1"/>
+          </p:cNvSpPr>
           <p:nvPr/>
         </p:nvSpPr>
         <p:spPr>
           <a:xfrm>
-            <a:off x="577813" y="2701512"/>
-            <a:ext cx="1570434" cy="300859"/>
-          </a:xfrm>
-          <a:prstGeom prst="rect">
+            <a:off x="9531736" y="2833338"/>
+            <a:ext cx="513064" cy="513064"/>
+          </a:xfrm>
+          <a:prstGeom prst="ellipse">
             <a:avLst/>
           </a:prstGeom>
-          <a:noFill/>
-        </p:spPr>
-        <p:txBody>
-          <a:bodyPr wrap="square">
-            <a:spAutoFit/>
-          </a:bodyPr>
-          <a:lstStyle/>
-          <a:p>
-            <a:pPr lvl="0">
-              <a:defRPr/>
-            </a:pPr>
-            <a:r>
-              <a:rPr lang="en-US" altLang="ko-KR" sz="1400" b="1">
-                <a:solidFill>
-                  <a:srgbClr val="ecedf1"/>
-                </a:solidFill>
-                <a:latin typeface="충북대70주년체 Regular"/>
-                <a:ea typeface="충북대70주년체 Regular"/>
-              </a:rPr>
-              <a:t>[</a:t>
-            </a:r>
-            <a:r>
-              <a:rPr lang="ko-KR" altLang="en-US" sz="1400" b="1">
-                <a:solidFill>
-                  <a:srgbClr val="ecedf1"/>
-                </a:solidFill>
-                <a:latin typeface="충북대70주년체 Regular"/>
-                <a:ea typeface="충북대70주년체 Regular"/>
-              </a:rPr>
-              <a:t>방해 요인</a:t>
-            </a:r>
-            <a:r>
-              <a:rPr lang="en-US" altLang="ko-KR" sz="1400" b="1">
-                <a:solidFill>
-                  <a:srgbClr val="ecedf1"/>
-                </a:solidFill>
-                <a:latin typeface="충북대70주년체 Regular"/>
-                <a:ea typeface="충북대70주년체 Regular"/>
-              </a:rPr>
-              <a:t>]</a:t>
-            </a:r>
-            <a:endParaRPr lang="en-US" altLang="ko-KR" sz="1400" b="1">
-              <a:solidFill>
-                <a:srgbClr val="ecedf1"/>
-              </a:solidFill>
-              <a:latin typeface="충북대70주년체 Regular"/>
-              <a:ea typeface="충북대70주년체 Regular"/>
-            </a:endParaRPr>
-          </a:p>
-        </p:txBody>
-      </p:sp>
-      <p:sp>
-        <p:nvSpPr>
-          <p:cNvPr id="57" name="사각형 설명선 56"/>
-          <p:cNvSpPr/>
-          <p:nvPr/>
-        </p:nvSpPr>
-        <p:spPr>
-          <a:xfrm>
-            <a:off x="2148247" y="2701512"/>
-            <a:ext cx="6194008" cy="644890"/>
-          </a:xfrm>
-          <a:prstGeom prst="wedgeRectCallout">
-            <a:avLst>
-              <a:gd name="adj1" fmla="val -51936"/>
-              <a:gd name="adj2" fmla="val -19421"/>
-            </a:avLst>
-          </a:prstGeom>
-          <a:noFill/>
+          <a:solidFill>
+            <a:srgbClr val="fce891"/>
+          </a:solidFill>
           <a:ln>
-            <a:solidFill>
-              <a:srgbClr val="767779"/>
-            </a:solidFill>
+            <a:noFill/>
           </a:ln>
         </p:spPr>
         <p:style>
@@ -8456,259 +9106,25 @@
       </p:sp>
       <p:sp>
         <p:nvSpPr>
-          <p:cNvPr id="58" name="가로 글상자 57"/>
-          <p:cNvSpPr txBox="1"/>
+          <p:cNvPr id="105" name="타원 104"/>
+          <p:cNvSpPr>
+            <a:spLocks noChangeAspect="1"/>
+          </p:cNvSpPr>
           <p:nvPr/>
         </p:nvSpPr>
         <p:spPr>
           <a:xfrm>
-            <a:off x="2195866" y="2701511"/>
-            <a:ext cx="6146388" cy="687484"/>
-          </a:xfrm>
-          <a:prstGeom prst="rect">
+            <a:off x="9531736" y="3528964"/>
+            <a:ext cx="513064" cy="513064"/>
+          </a:xfrm>
+          <a:prstGeom prst="ellipse">
             <a:avLst/>
           </a:prstGeom>
-          <a:noFill/>
-        </p:spPr>
-        <p:txBody>
-          <a:bodyPr wrap="square">
-            <a:spAutoFit/>
-          </a:bodyPr>
-          <a:lstStyle/>
-          <a:p>
-            <a:pPr lvl="0">
-              <a:lnSpc>
-                <a:spcPct val="120000"/>
-              </a:lnSpc>
-              <a:defRPr/>
-            </a:pPr>
-            <a:r>
-              <a:rPr lang="ko-KR" altLang="en-US" sz="1100" b="1" spc="100">
-                <a:solidFill>
-                  <a:srgbClr val="eb657e"/>
-                </a:solidFill>
-                <a:latin typeface="충북대70주년체 Regular"/>
-                <a:ea typeface="충북대70주년체 Regular"/>
-              </a:rPr>
-              <a:t>몬스터와 퍼즐</a:t>
-            </a:r>
-            <a:r>
-              <a:rPr lang="ko-KR" altLang="en-US" sz="1100" b="1" spc="100">
-                <a:solidFill>
-                  <a:srgbClr val="767779"/>
-                </a:solidFill>
-                <a:latin typeface="충북대70주년체 Regular"/>
-                <a:ea typeface="충북대70주년체 Regular"/>
-              </a:rPr>
-              <a:t>이 물리적인 장애로 등장하며</a:t>
-            </a:r>
-            <a:r>
-              <a:rPr lang="en-US" altLang="ko-KR" sz="1100" b="1" spc="100">
-                <a:solidFill>
-                  <a:srgbClr val="767779"/>
-                </a:solidFill>
-                <a:latin typeface="충북대70주년체 Regular"/>
-                <a:ea typeface="충북대70주년체 Regular"/>
-              </a:rPr>
-              <a:t>,</a:t>
-            </a:r>
-            <a:endParaRPr lang="en-US" altLang="ko-KR" sz="1100" b="1" spc="100">
-              <a:solidFill>
-                <a:srgbClr val="767779"/>
-              </a:solidFill>
-              <a:latin typeface="충북대70주년체 Regular"/>
-              <a:ea typeface="충북대70주년체 Regular"/>
-            </a:endParaRPr>
-          </a:p>
-          <a:p>
-            <a:pPr lvl="0">
-              <a:lnSpc>
-                <a:spcPct val="120000"/>
-              </a:lnSpc>
-              <a:defRPr/>
-            </a:pPr>
-            <a:r>
-              <a:rPr lang="ko-KR" altLang="en-US" sz="1100" b="1" spc="100">
-                <a:solidFill>
-                  <a:srgbClr val="767779"/>
-                </a:solidFill>
-                <a:latin typeface="충북대70주년체 Regular"/>
-                <a:ea typeface="충북대70주년체 Regular"/>
-              </a:rPr>
-              <a:t>동시에 </a:t>
-            </a:r>
-            <a:r>
-              <a:rPr lang="ko-KR" altLang="en-US" sz="1100" b="1" spc="100">
-                <a:solidFill>
-                  <a:srgbClr val="eb657e"/>
-                </a:solidFill>
-                <a:latin typeface="충북대70주년체 Regular"/>
-                <a:ea typeface="충북대70주년체 Regular"/>
-              </a:rPr>
-              <a:t>주변 인물들의 말과 반복되는 요구</a:t>
-            </a:r>
-            <a:r>
-              <a:rPr lang="ko-KR" altLang="en-US" sz="1100" b="1" spc="100">
-                <a:solidFill>
-                  <a:srgbClr val="767779"/>
-                </a:solidFill>
-                <a:latin typeface="충북대70주년체 Regular"/>
-                <a:ea typeface="충북대70주년체 Regular"/>
-              </a:rPr>
-              <a:t>는 심리적인 압박으로 작용해</a:t>
-            </a:r>
-            <a:r>
-              <a:rPr lang="en-US" altLang="ko-KR" sz="1100" b="1" spc="100">
-                <a:solidFill>
-                  <a:srgbClr val="767779"/>
-                </a:solidFill>
-                <a:latin typeface="충북대70주년체 Regular"/>
-                <a:ea typeface="충북대70주년체 Regular"/>
-              </a:rPr>
-              <a:t>,</a:t>
-            </a:r>
-            <a:endParaRPr lang="en-US" altLang="ko-KR" sz="1100" b="1" spc="100">
-              <a:solidFill>
-                <a:srgbClr val="767779"/>
-              </a:solidFill>
-              <a:latin typeface="충북대70주년체 Regular"/>
-              <a:ea typeface="충북대70주년체 Regular"/>
-            </a:endParaRPr>
-          </a:p>
-          <a:p>
-            <a:pPr lvl="0">
-              <a:lnSpc>
-                <a:spcPct val="120000"/>
-              </a:lnSpc>
-              <a:defRPr/>
-            </a:pPr>
-            <a:r>
-              <a:rPr lang="ko-KR" altLang="en-US" sz="1100" b="1" spc="100">
-                <a:solidFill>
-                  <a:srgbClr val="fce891"/>
-                </a:solidFill>
-                <a:latin typeface="충북대70주년체 Regular"/>
-                <a:ea typeface="충북대70주년체 Regular"/>
-              </a:rPr>
-              <a:t>플레이어가 특정한 선택을 하도록 몰아가는 상황</a:t>
-            </a:r>
-            <a:r>
-              <a:rPr lang="ko-KR" altLang="en-US" sz="1100" b="1" spc="100">
-                <a:solidFill>
-                  <a:srgbClr val="767779"/>
-                </a:solidFill>
-                <a:latin typeface="충북대70주년체 Regular"/>
-                <a:ea typeface="충북대70주년체 Regular"/>
-              </a:rPr>
-              <a:t>을 만든다</a:t>
-            </a:r>
-            <a:r>
-              <a:rPr lang="en-US" altLang="ko-KR" sz="1100" b="1" spc="100">
-                <a:solidFill>
-                  <a:srgbClr val="767779"/>
-                </a:solidFill>
-                <a:latin typeface="충북대70주년체 Regular"/>
-                <a:ea typeface="충북대70주년체 Regular"/>
-              </a:rPr>
-              <a:t>.</a:t>
-            </a:r>
-            <a:endParaRPr lang="en-US" altLang="ko-KR" sz="1100" b="1" spc="100">
-              <a:solidFill>
-                <a:srgbClr val="767779"/>
-              </a:solidFill>
-              <a:latin typeface="충북대70주년체 Regular"/>
-              <a:ea typeface="충북대70주년체 Regular"/>
-            </a:endParaRPr>
-          </a:p>
-        </p:txBody>
-      </p:sp>
-      <p:sp>
-        <p:nvSpPr>
-          <p:cNvPr id="59" name="가로 글상자 58"/>
-          <p:cNvSpPr txBox="1"/>
-          <p:nvPr/>
-        </p:nvSpPr>
-        <p:spPr>
-          <a:xfrm>
-            <a:off x="577813" y="1712338"/>
-            <a:ext cx="1570434" cy="299574"/>
-          </a:xfrm>
-          <a:prstGeom prst="rect">
-            <a:avLst/>
-          </a:prstGeom>
-          <a:noFill/>
-        </p:spPr>
-        <p:txBody>
-          <a:bodyPr wrap="square">
-            <a:spAutoFit/>
-          </a:bodyPr>
-          <a:lstStyle/>
-          <a:p>
-            <a:pPr lvl="0">
-              <a:defRPr/>
-            </a:pPr>
-            <a:r>
-              <a:rPr lang="en-US" altLang="ko-KR" sz="1400" b="1">
-                <a:solidFill>
-                  <a:srgbClr val="ecedf1"/>
-                </a:solidFill>
-                <a:latin typeface="충북대70주년체 Regular"/>
-                <a:ea typeface="충북대70주년체 Regular"/>
-              </a:rPr>
-              <a:t>[</a:t>
-            </a:r>
-            <a:r>
-              <a:rPr lang="ko-KR" altLang="en-US" sz="1400" b="1">
-                <a:solidFill>
-                  <a:srgbClr val="ecedf1"/>
-                </a:solidFill>
-                <a:latin typeface="충북대70주년체 Regular"/>
-                <a:ea typeface="충북대70주년체 Regular"/>
-              </a:rPr>
-              <a:t>플레이 작용 요소</a:t>
-            </a:r>
-            <a:r>
-              <a:rPr lang="en-US" altLang="ko-KR" sz="1400" b="1">
-                <a:solidFill>
-                  <a:srgbClr val="ecedf1"/>
-                </a:solidFill>
-                <a:latin typeface="충북대70주년체 Regular"/>
-                <a:ea typeface="충북대70주년체 Regular"/>
-              </a:rPr>
-              <a:t>]</a:t>
-            </a:r>
-            <a:endParaRPr lang="en-US" altLang="ko-KR" sz="1400" b="1">
-              <a:solidFill>
-                <a:srgbClr val="ecedf1"/>
-              </a:solidFill>
-              <a:latin typeface="충북대70주년체 Regular"/>
-              <a:ea typeface="충북대70주년체 Regular"/>
-            </a:endParaRPr>
-          </a:p>
-        </p:txBody>
-      </p:sp>
-      <p:sp>
-        <p:nvSpPr>
-          <p:cNvPr id="60" name="사각형 설명선 59"/>
-          <p:cNvSpPr/>
-          <p:nvPr/>
-        </p:nvSpPr>
-        <p:spPr>
-          <a:xfrm>
-            <a:off x="2148247" y="1712339"/>
-            <a:ext cx="6194008" cy="686055"/>
-          </a:xfrm>
-          <a:prstGeom prst="wedgeRectCallout">
-            <a:avLst>
-              <a:gd name="adj1" fmla="val -51936"/>
-              <a:gd name="adj2" fmla="val -19421"/>
-            </a:avLst>
-          </a:prstGeom>
-          <a:noFill/>
+          <a:solidFill>
+            <a:srgbClr val="496f78"/>
+          </a:solidFill>
           <a:ln>
-            <a:solidFill>
-              <a:srgbClr val="767779"/>
-            </a:solidFill>
+            <a:noFill/>
           </a:ln>
         </p:spPr>
         <p:style>
@@ -8740,190 +9156,22 @@
       </p:sp>
       <p:sp>
         <p:nvSpPr>
-          <p:cNvPr id="61" name="가로 글상자 60"/>
-          <p:cNvSpPr txBox="1"/>
+          <p:cNvPr id="106" name="타원 105"/>
+          <p:cNvSpPr>
+            <a:spLocks noChangeAspect="1"/>
+          </p:cNvSpPr>
           <p:nvPr/>
         </p:nvSpPr>
         <p:spPr>
           <a:xfrm>
-            <a:off x="2195867" y="1712338"/>
-            <a:ext cx="6146388" cy="686057"/>
-          </a:xfrm>
-          <a:prstGeom prst="rect">
-            <a:avLst/>
-          </a:prstGeom>
-          <a:noFill/>
-        </p:spPr>
-        <p:txBody>
-          <a:bodyPr wrap="square">
-            <a:spAutoFit/>
-          </a:bodyPr>
-          <a:lstStyle/>
-          <a:p>
-            <a:pPr lvl="0">
-              <a:lnSpc>
-                <a:spcPct val="120000"/>
-              </a:lnSpc>
-              <a:defRPr/>
-            </a:pPr>
-            <a:r>
-              <a:rPr lang="ko-KR" altLang="en-US" sz="1100" b="1" spc="100">
-                <a:solidFill>
-                  <a:srgbClr val="767779"/>
-                </a:solidFill>
-                <a:latin typeface="충북대70주년체 Regular"/>
-                <a:ea typeface="충북대70주년체 Regular"/>
-              </a:rPr>
-              <a:t>플레이어는 </a:t>
-            </a:r>
-            <a:r>
-              <a:rPr lang="ko-KR" altLang="en-US" sz="1100" b="1" spc="100">
-                <a:solidFill>
-                  <a:srgbClr val="ecedf1"/>
-                </a:solidFill>
-                <a:latin typeface="충북대70주년체 Regular"/>
-                <a:ea typeface="충북대70주년체 Regular"/>
-              </a:rPr>
-              <a:t>대화와 행동 선택</a:t>
-            </a:r>
-            <a:r>
-              <a:rPr lang="ko-KR" altLang="en-US" sz="1100" b="1" spc="100">
-                <a:solidFill>
-                  <a:srgbClr val="767779"/>
-                </a:solidFill>
-                <a:latin typeface="충북대70주년체 Regular"/>
-                <a:ea typeface="충북대70주년체 Regular"/>
-              </a:rPr>
-              <a:t>을 통해 상황에 개입한다</a:t>
-            </a:r>
-            <a:r>
-              <a:rPr lang="en-US" altLang="ko-KR" sz="1100" b="1" spc="100">
-                <a:solidFill>
-                  <a:srgbClr val="767779"/>
-                </a:solidFill>
-                <a:latin typeface="충북대70주년체 Regular"/>
-                <a:ea typeface="충북대70주년체 Regular"/>
-              </a:rPr>
-              <a:t>.</a:t>
-            </a:r>
-            <a:endParaRPr lang="en-US" altLang="ko-KR" sz="1100" b="1" spc="100">
-              <a:solidFill>
-                <a:srgbClr val="767779"/>
-              </a:solidFill>
-              <a:latin typeface="충북대70주년체 Regular"/>
-              <a:ea typeface="충북대70주년체 Regular"/>
-            </a:endParaRPr>
-          </a:p>
-          <a:p>
-            <a:pPr lvl="0">
-              <a:lnSpc>
-                <a:spcPct val="120000"/>
-              </a:lnSpc>
-              <a:defRPr/>
-            </a:pPr>
-            <a:r>
-              <a:rPr lang="ko-KR" altLang="en-US" sz="1100" b="1" spc="100">
-                <a:solidFill>
-                  <a:srgbClr val="767779"/>
-                </a:solidFill>
-                <a:latin typeface="충북대70주년체 Regular"/>
-                <a:ea typeface="충북대70주년체 Regular"/>
-              </a:rPr>
-              <a:t>선택은 즉각적인 결과뿐 아니라 </a:t>
-            </a:r>
-            <a:r>
-              <a:rPr lang="ko-KR" altLang="en-US" sz="1100" b="1" spc="100">
-                <a:solidFill>
-                  <a:srgbClr val="ecedf1"/>
-                </a:solidFill>
-                <a:latin typeface="충북대70주년체 Regular"/>
-                <a:ea typeface="충북대70주년체 Regular"/>
-              </a:rPr>
-              <a:t>이후 전개과 선택지 구성에 누적된 영향</a:t>
-            </a:r>
-            <a:r>
-              <a:rPr lang="ko-KR" altLang="en-US" sz="1100" b="1" spc="100">
-                <a:solidFill>
-                  <a:srgbClr val="767779"/>
-                </a:solidFill>
-                <a:latin typeface="충북대70주년체 Regular"/>
-                <a:ea typeface="충북대70주년체 Regular"/>
-              </a:rPr>
-              <a:t>을 미치며</a:t>
-            </a:r>
-            <a:r>
-              <a:rPr lang="en-US" altLang="ko-KR" sz="1100" b="1" spc="100">
-                <a:solidFill>
-                  <a:srgbClr val="767779"/>
-                </a:solidFill>
-                <a:latin typeface="충북대70주년체 Regular"/>
-                <a:ea typeface="충북대70주년체 Regular"/>
-              </a:rPr>
-              <a:t>,</a:t>
-            </a:r>
-            <a:endParaRPr lang="en-US" altLang="ko-KR" sz="1100" b="1" spc="100">
-              <a:solidFill>
-                <a:srgbClr val="767779"/>
-              </a:solidFill>
-              <a:latin typeface="충북대70주년체 Regular"/>
-              <a:ea typeface="충북대70주년체 Regular"/>
-            </a:endParaRPr>
-          </a:p>
-          <a:p>
-            <a:pPr lvl="0">
-              <a:lnSpc>
-                <a:spcPct val="120000"/>
-              </a:lnSpc>
-              <a:defRPr/>
-            </a:pPr>
-            <a:r>
-              <a:rPr lang="ko-KR" altLang="en-US" sz="1100" b="1" spc="100">
-                <a:solidFill>
-                  <a:srgbClr val="767779"/>
-                </a:solidFill>
-                <a:latin typeface="충북대70주년체 Regular"/>
-                <a:ea typeface="충북대70주년체 Regular"/>
-              </a:rPr>
-              <a:t>주인공이 주변의 기대에 어떻게 반응해 왔는 지를 드러낸다</a:t>
-            </a:r>
-            <a:r>
-              <a:rPr lang="en-US" altLang="ko-KR" sz="1100" b="1" spc="100">
-                <a:solidFill>
-                  <a:srgbClr val="767779"/>
-                </a:solidFill>
-                <a:latin typeface="충북대70주년체 Regular"/>
-                <a:ea typeface="충북대70주년체 Regular"/>
-              </a:rPr>
-              <a:t>.</a:t>
-            </a:r>
-            <a:endParaRPr lang="en-US" altLang="ko-KR" sz="1100" b="1" spc="100">
-              <a:solidFill>
-                <a:srgbClr val="767779"/>
-              </a:solidFill>
-              <a:latin typeface="충북대70주년체 Regular"/>
-              <a:ea typeface="충북대70주년체 Regular"/>
-            </a:endParaRPr>
-          </a:p>
-        </p:txBody>
-      </p:sp>
-      <p:sp>
-        <p:nvSpPr>
-          <p:cNvPr id="82" name="타원 81"/>
-          <p:cNvSpPr>
-            <a:spLocks noChangeAspect="1"/>
-          </p:cNvSpPr>
-          <p:nvPr/>
-        </p:nvSpPr>
-        <p:spPr>
-          <a:xfrm>
-            <a:off x="9531736" y="6344936"/>
+            <a:off x="9531736" y="4897779"/>
             <a:ext cx="513064" cy="513064"/>
           </a:xfrm>
           <a:prstGeom prst="ellipse">
             <a:avLst/>
           </a:prstGeom>
           <a:solidFill>
-            <a:srgbClr val="ecedf1"/>
+            <a:srgbClr val="8b5587"/>
           </a:solidFill>
           <a:ln>
             <a:noFill/>
@@ -8958,130 +9206,22 @@
       </p:sp>
       <p:sp>
         <p:nvSpPr>
-          <p:cNvPr id="83" name="TextBox 1"/>
-          <p:cNvSpPr txBox="1"/>
+          <p:cNvPr id="107" name="타원 106"/>
+          <p:cNvSpPr>
+            <a:spLocks noChangeAspect="1"/>
+          </p:cNvSpPr>
           <p:nvPr/>
         </p:nvSpPr>
         <p:spPr>
           <a:xfrm>
-            <a:off x="9316166" y="0"/>
-            <a:ext cx="1457269" cy="1150620"/>
-          </a:xfrm>
-          <a:prstGeom prst="rect">
-            <a:avLst/>
-          </a:prstGeom>
-          <a:noFill/>
-        </p:spPr>
-        <p:txBody>
-          <a:bodyPr wrap="square">
-            <a:spAutoFit/>
-          </a:bodyPr>
-          <a:lstStyle/>
-          <a:p>
-            <a:pPr lvl="0">
-              <a:defRPr/>
-            </a:pPr>
-            <a:r>
-              <a:rPr lang="ko-KR" altLang="en-US" sz="1900">
-                <a:latin typeface="충북대70주년체 Regular"/>
-                <a:ea typeface="충북대70주년체 Regular"/>
-              </a:rPr>
-              <a:t>글자 크기</a:t>
-            </a:r>
-            <a:endParaRPr lang="ko-KR" altLang="en-US">
-              <a:latin typeface="충북대70주년체 Regular"/>
-              <a:ea typeface="충북대70주년체 Regular"/>
-            </a:endParaRPr>
-          </a:p>
-          <a:p>
-            <a:pPr lvl="0">
-              <a:defRPr/>
-            </a:pPr>
-            <a:r>
-              <a:rPr lang="ko-KR" altLang="en-US" sz="2600">
-                <a:latin typeface="충북대70주년체 Regular"/>
-                <a:ea typeface="충북대70주년체 Regular"/>
-              </a:rPr>
-              <a:t>ㄱ </a:t>
-            </a:r>
-            <a:r>
-              <a:rPr lang="en-US" altLang="ko-KR" sz="2600">
-                <a:latin typeface="충북대70주년체 Regular"/>
-                <a:ea typeface="충북대70주년체 Regular"/>
-              </a:rPr>
-              <a:t>(35)</a:t>
-            </a:r>
-            <a:endParaRPr lang="en-US" altLang="ko-KR" sz="2600">
-              <a:latin typeface="충북대70주년체 Regular"/>
-              <a:ea typeface="충북대70주년체 Regular"/>
-            </a:endParaRPr>
-          </a:p>
-          <a:p>
-            <a:pPr lvl="0">
-              <a:defRPr/>
-            </a:pPr>
-            <a:r>
-              <a:rPr lang="ko-KR" altLang="en-US" sz="1400">
-                <a:latin typeface="충북대70주년체 Regular"/>
-                <a:ea typeface="충북대70주년체 Regular"/>
-              </a:rPr>
-              <a:t>ㄱ </a:t>
-            </a:r>
-            <a:r>
-              <a:rPr lang="en-US" altLang="ko-KR" sz="1400">
-                <a:latin typeface="충북대70주년체 Regular"/>
-                <a:ea typeface="충북대70주년체 Regular"/>
-              </a:rPr>
-              <a:t>(19)</a:t>
-            </a:r>
-            <a:endParaRPr lang="en-US" altLang="ko-KR" sz="1400">
-              <a:latin typeface="충북대70주년체 Regular"/>
-              <a:ea typeface="충북대70주년체 Regular"/>
-            </a:endParaRPr>
-          </a:p>
-          <a:p>
-            <a:pPr lvl="0">
-              <a:defRPr/>
-            </a:pPr>
-            <a:r>
-              <a:rPr lang="ko-KR" altLang="en-US" sz="1100">
-                <a:latin typeface="충북대70주년체 Regular"/>
-                <a:ea typeface="충북대70주년체 Regular"/>
-              </a:rPr>
-              <a:t>ㄱ </a:t>
-            </a:r>
-            <a:r>
-              <a:rPr lang="en-US" altLang="ko-KR" sz="1100">
-                <a:latin typeface="충북대70주년체 Regular"/>
-                <a:ea typeface="충북대70주년체 Regular"/>
-              </a:rPr>
-              <a:t>(11)</a:t>
-            </a:r>
-            <a:endParaRPr lang="en-US" altLang="ko-KR" sz="1100">
-              <a:latin typeface="충북대70주년체 Regular"/>
-              <a:ea typeface="충북대70주년체 Regular"/>
-            </a:endParaRPr>
-          </a:p>
-        </p:txBody>
-      </p:sp>
-      <p:sp>
-        <p:nvSpPr>
-          <p:cNvPr id="84" name="타원 83"/>
-          <p:cNvSpPr>
-            <a:spLocks noChangeAspect="1"/>
-          </p:cNvSpPr>
-          <p:nvPr/>
-        </p:nvSpPr>
-        <p:spPr>
-          <a:xfrm>
-            <a:off x="9531736" y="2188448"/>
+            <a:off x="9531736" y="4234481"/>
             <a:ext cx="513064" cy="513064"/>
           </a:xfrm>
           <a:prstGeom prst="ellipse">
             <a:avLst/>
           </a:prstGeom>
           <a:solidFill>
-            <a:srgbClr val="eb657e"/>
+            <a:srgbClr val="767779"/>
           </a:solidFill>
           <a:ln>
             <a:noFill/>
@@ -9116,7 +9256,7 @@
       </p:sp>
       <p:sp>
         <p:nvSpPr>
-          <p:cNvPr id="85" name="타원 84"/>
+          <p:cNvPr id="108" name="타원 107"/>
           <p:cNvSpPr>
             <a:spLocks noChangeAspect="1"/>
           </p:cNvSpPr>
@@ -9124,14 +9264,14 @@
         </p:nvSpPr>
         <p:spPr>
           <a:xfrm>
-            <a:off x="9531736" y="2833338"/>
+            <a:off x="9531736" y="5627054"/>
             <a:ext cx="513064" cy="513064"/>
           </a:xfrm>
           <a:prstGeom prst="ellipse">
             <a:avLst/>
           </a:prstGeom>
           <a:solidFill>
-            <a:srgbClr val="fce891"/>
+            <a:srgbClr val="1e0d20"/>
           </a:solidFill>
           <a:ln>
             <a:noFill/>
@@ -9166,207 +9306,7 @@
       </p:sp>
       <p:sp>
         <p:nvSpPr>
-          <p:cNvPr id="86" name="타원 85"/>
-          <p:cNvSpPr>
-            <a:spLocks noChangeAspect="1"/>
-          </p:cNvSpPr>
-          <p:nvPr/>
-        </p:nvSpPr>
-        <p:spPr>
-          <a:xfrm>
-            <a:off x="9531736" y="3528964"/>
-            <a:ext cx="513064" cy="513064"/>
-          </a:xfrm>
-          <a:prstGeom prst="ellipse">
-            <a:avLst/>
-          </a:prstGeom>
-          <a:solidFill>
-            <a:srgbClr val="496f78"/>
-          </a:solidFill>
-          <a:ln>
-            <a:noFill/>
-          </a:ln>
-        </p:spPr>
-        <p:style>
-          <a:lnRef idx="2">
-            <a:schemeClr val="accent1">
-              <a:shade val="20000"/>
-            </a:schemeClr>
-          </a:lnRef>
-          <a:fillRef idx="1">
-            <a:schemeClr val="accent1"/>
-          </a:fillRef>
-          <a:effectRef idx="0">
-            <a:schemeClr val="accent1"/>
-          </a:effectRef>
-          <a:fontRef idx="minor">
-            <a:schemeClr val="lt1"/>
-          </a:fontRef>
-        </p:style>
-        <p:txBody>
-          <a:bodyPr anchor="ctr"/>
-          <a:lstStyle/>
-          <a:p>
-            <a:pPr lvl="0" algn="ctr">
-              <a:defRPr/>
-            </a:pPr>
-            <a:endParaRPr lang="ko-KR" altLang="en-US"/>
-          </a:p>
-        </p:txBody>
-      </p:sp>
-      <p:sp>
-        <p:nvSpPr>
-          <p:cNvPr id="87" name="타원 86"/>
-          <p:cNvSpPr>
-            <a:spLocks noChangeAspect="1"/>
-          </p:cNvSpPr>
-          <p:nvPr/>
-        </p:nvSpPr>
-        <p:spPr>
-          <a:xfrm>
-            <a:off x="9531736" y="4897779"/>
-            <a:ext cx="513064" cy="513064"/>
-          </a:xfrm>
-          <a:prstGeom prst="ellipse">
-            <a:avLst/>
-          </a:prstGeom>
-          <a:solidFill>
-            <a:srgbClr val="8b5587"/>
-          </a:solidFill>
-          <a:ln>
-            <a:noFill/>
-          </a:ln>
-        </p:spPr>
-        <p:style>
-          <a:lnRef idx="2">
-            <a:schemeClr val="accent1">
-              <a:shade val="20000"/>
-            </a:schemeClr>
-          </a:lnRef>
-          <a:fillRef idx="1">
-            <a:schemeClr val="accent1"/>
-          </a:fillRef>
-          <a:effectRef idx="0">
-            <a:schemeClr val="accent1"/>
-          </a:effectRef>
-          <a:fontRef idx="minor">
-            <a:schemeClr val="lt1"/>
-          </a:fontRef>
-        </p:style>
-        <p:txBody>
-          <a:bodyPr anchor="ctr"/>
-          <a:lstStyle/>
-          <a:p>
-            <a:pPr lvl="0" algn="ctr">
-              <a:defRPr/>
-            </a:pPr>
-            <a:endParaRPr lang="ko-KR" altLang="en-US"/>
-          </a:p>
-        </p:txBody>
-      </p:sp>
-      <p:sp>
-        <p:nvSpPr>
-          <p:cNvPr id="88" name="타원 87"/>
-          <p:cNvSpPr>
-            <a:spLocks noChangeAspect="1"/>
-          </p:cNvSpPr>
-          <p:nvPr/>
-        </p:nvSpPr>
-        <p:spPr>
-          <a:xfrm>
-            <a:off x="9531736" y="4234481"/>
-            <a:ext cx="513064" cy="513064"/>
-          </a:xfrm>
-          <a:prstGeom prst="ellipse">
-            <a:avLst/>
-          </a:prstGeom>
-          <a:solidFill>
-            <a:srgbClr val="767779"/>
-          </a:solidFill>
-          <a:ln>
-            <a:noFill/>
-          </a:ln>
-        </p:spPr>
-        <p:style>
-          <a:lnRef idx="2">
-            <a:schemeClr val="accent1">
-              <a:shade val="20000"/>
-            </a:schemeClr>
-          </a:lnRef>
-          <a:fillRef idx="1">
-            <a:schemeClr val="accent1"/>
-          </a:fillRef>
-          <a:effectRef idx="0">
-            <a:schemeClr val="accent1"/>
-          </a:effectRef>
-          <a:fontRef idx="minor">
-            <a:schemeClr val="lt1"/>
-          </a:fontRef>
-        </p:style>
-        <p:txBody>
-          <a:bodyPr anchor="ctr"/>
-          <a:lstStyle/>
-          <a:p>
-            <a:pPr lvl="0" algn="ctr">
-              <a:defRPr/>
-            </a:pPr>
-            <a:endParaRPr lang="ko-KR" altLang="en-US"/>
-          </a:p>
-        </p:txBody>
-      </p:sp>
-      <p:sp>
-        <p:nvSpPr>
-          <p:cNvPr id="89" name="타원 88"/>
-          <p:cNvSpPr>
-            <a:spLocks noChangeAspect="1"/>
-          </p:cNvSpPr>
-          <p:nvPr/>
-        </p:nvSpPr>
-        <p:spPr>
-          <a:xfrm>
-            <a:off x="9531736" y="5627054"/>
-            <a:ext cx="513064" cy="513064"/>
-          </a:xfrm>
-          <a:prstGeom prst="ellipse">
-            <a:avLst/>
-          </a:prstGeom>
-          <a:solidFill>
-            <a:srgbClr val="1e0d20"/>
-          </a:solidFill>
-          <a:ln>
-            <a:noFill/>
-          </a:ln>
-        </p:spPr>
-        <p:style>
-          <a:lnRef idx="2">
-            <a:schemeClr val="accent1">
-              <a:shade val="20000"/>
-            </a:schemeClr>
-          </a:lnRef>
-          <a:fillRef idx="1">
-            <a:schemeClr val="accent1"/>
-          </a:fillRef>
-          <a:effectRef idx="0">
-            <a:schemeClr val="accent1"/>
-          </a:effectRef>
-          <a:fontRef idx="minor">
-            <a:schemeClr val="lt1"/>
-          </a:fontRef>
-        </p:style>
-        <p:txBody>
-          <a:bodyPr anchor="ctr"/>
-          <a:lstStyle/>
-          <a:p>
-            <a:pPr lvl="0" algn="ctr">
-              <a:defRPr/>
-            </a:pPr>
-            <a:endParaRPr lang="ko-KR" altLang="en-US"/>
-          </a:p>
-        </p:txBody>
-      </p:sp>
-      <p:sp>
-        <p:nvSpPr>
-          <p:cNvPr id="90" name="TextBox 1"/>
+          <p:cNvPr id="109" name="TextBox 1"/>
           <p:cNvSpPr txBox="1"/>
           <p:nvPr/>
         </p:nvSpPr>
@@ -9430,255 +9370,6 @@
               <a:latin typeface="충북대70주년체 Regular"/>
               <a:ea typeface="충북대70주년체 Regular"/>
             </a:endParaRPr>
-          </a:p>
-        </p:txBody>
-      </p:sp>
-      <p:sp>
-        <p:nvSpPr>
-          <p:cNvPr id="91" name="가로 글상자 90"/>
-          <p:cNvSpPr txBox="1"/>
-          <p:nvPr/>
-        </p:nvSpPr>
-        <p:spPr>
-          <a:xfrm>
-            <a:off x="509586" y="294858"/>
-            <a:ext cx="3933968" cy="617637"/>
-          </a:xfrm>
-          <a:prstGeom prst="rect">
-            <a:avLst/>
-          </a:prstGeom>
-          <a:noFill/>
-        </p:spPr>
-        <p:txBody>
-          <a:bodyPr wrap="square">
-            <a:spAutoFit/>
-          </a:bodyPr>
-          <a:lstStyle/>
-          <a:p>
-            <a:pPr lvl="0">
-              <a:defRPr/>
-            </a:pPr>
-            <a:r>
-              <a:rPr lang="ko-KR" altLang="en-US" sz="3500" b="1">
-                <a:solidFill>
-                  <a:srgbClr val="ecedf1"/>
-                </a:solidFill>
-                <a:latin typeface="충북대70주년체 Regular"/>
-                <a:ea typeface="충북대70주년체 Regular"/>
-              </a:rPr>
-              <a:t>게임의 정의</a:t>
-            </a:r>
-            <a:endParaRPr lang="ko-KR" altLang="en-US" sz="3500" b="1">
-              <a:solidFill>
-                <a:srgbClr val="ecedf1"/>
-              </a:solidFill>
-              <a:latin typeface="충북대70주년체 Regular"/>
-              <a:ea typeface="충북대70주년체 Regular"/>
-            </a:endParaRPr>
-          </a:p>
-        </p:txBody>
-      </p:sp>
-      <p:sp>
-        <p:nvSpPr>
-          <p:cNvPr id="92" name="뺄셈 기호 91"/>
-          <p:cNvSpPr/>
-          <p:nvPr/>
-        </p:nvSpPr>
-        <p:spPr>
-          <a:xfrm>
-            <a:off x="1513246" y="770927"/>
-            <a:ext cx="317500" cy="283134"/>
-          </a:xfrm>
-          <a:prstGeom prst="mathMinus">
-            <a:avLst>
-              <a:gd name="adj1" fmla="val 23520"/>
-            </a:avLst>
-          </a:prstGeom>
-          <a:solidFill>
-            <a:srgbClr val="ecedf1"/>
-          </a:solidFill>
-          <a:ln>
-            <a:noFill/>
-          </a:ln>
-        </p:spPr>
-        <p:style>
-          <a:lnRef idx="2">
-            <a:schemeClr val="accent1">
-              <a:shade val="20000"/>
-            </a:schemeClr>
-          </a:lnRef>
-          <a:fillRef idx="1">
-            <a:schemeClr val="accent1"/>
-          </a:fillRef>
-          <a:effectRef idx="0">
-            <a:schemeClr val="accent1"/>
-          </a:effectRef>
-          <a:fontRef idx="minor">
-            <a:schemeClr val="lt1"/>
-          </a:fontRef>
-        </p:style>
-        <p:txBody>
-          <a:bodyPr anchor="ctr"/>
-          <a:lstStyle/>
-          <a:p>
-            <a:pPr lvl="0" algn="ctr">
-              <a:defRPr/>
-            </a:pPr>
-            <a:endParaRPr lang="ko-KR" altLang="en-US"/>
-          </a:p>
-        </p:txBody>
-      </p:sp>
-      <p:sp>
-        <p:nvSpPr>
-          <p:cNvPr id="93" name="뺄셈 기호 92"/>
-          <p:cNvSpPr/>
-          <p:nvPr/>
-        </p:nvSpPr>
-        <p:spPr>
-          <a:xfrm>
-            <a:off x="1195746" y="770927"/>
-            <a:ext cx="317500" cy="283134"/>
-          </a:xfrm>
-          <a:prstGeom prst="mathMinus">
-            <a:avLst>
-              <a:gd name="adj1" fmla="val 23520"/>
-            </a:avLst>
-          </a:prstGeom>
-          <a:solidFill>
-            <a:srgbClr val="ecedf1"/>
-          </a:solidFill>
-          <a:ln>
-            <a:noFill/>
-          </a:ln>
-        </p:spPr>
-        <p:style>
-          <a:lnRef idx="2">
-            <a:schemeClr val="accent1">
-              <a:shade val="20000"/>
-            </a:schemeClr>
-          </a:lnRef>
-          <a:fillRef idx="1">
-            <a:schemeClr val="accent1"/>
-          </a:fillRef>
-          <a:effectRef idx="0">
-            <a:schemeClr val="accent1"/>
-          </a:effectRef>
-          <a:fontRef idx="minor">
-            <a:schemeClr val="lt1"/>
-          </a:fontRef>
-        </p:style>
-        <p:txBody>
-          <a:bodyPr anchor="ctr"/>
-          <a:lstStyle/>
-          <a:p>
-            <a:pPr lvl="0" algn="ctr">
-              <a:defRPr/>
-            </a:pPr>
-            <a:endParaRPr lang="ko-KR" altLang="en-US"/>
-          </a:p>
-        </p:txBody>
-      </p:sp>
-      <p:sp>
-        <p:nvSpPr>
-          <p:cNvPr id="94" name="뺄셈 기호 93"/>
-          <p:cNvSpPr/>
-          <p:nvPr/>
-        </p:nvSpPr>
-        <p:spPr>
-          <a:xfrm>
-            <a:off x="878246" y="770927"/>
-            <a:ext cx="317500" cy="283134"/>
-          </a:xfrm>
-          <a:prstGeom prst="mathMinus">
-            <a:avLst>
-              <a:gd name="adj1" fmla="val 23520"/>
-            </a:avLst>
-          </a:prstGeom>
-          <a:solidFill>
-            <a:srgbClr val="fce891"/>
-          </a:solidFill>
-          <a:ln>
-            <a:noFill/>
-          </a:ln>
-        </p:spPr>
-        <p:style>
-          <a:lnRef idx="2">
-            <a:schemeClr val="accent1">
-              <a:shade val="20000"/>
-            </a:schemeClr>
-          </a:lnRef>
-          <a:fillRef idx="1">
-            <a:schemeClr val="accent1"/>
-          </a:fillRef>
-          <a:effectRef idx="0">
-            <a:schemeClr val="accent1"/>
-          </a:effectRef>
-          <a:fontRef idx="minor">
-            <a:schemeClr val="lt1"/>
-          </a:fontRef>
-        </p:style>
-        <p:txBody>
-          <a:bodyPr anchor="ctr"/>
-          <a:lstStyle/>
-          <a:p>
-            <a:pPr lvl="0" algn="ctr">
-              <a:defRPr/>
-            </a:pPr>
-            <a:endParaRPr lang="ko-KR" altLang="en-US">
-              <a:solidFill>
-                <a:srgbClr val="fce891"/>
-              </a:solidFill>
-            </a:endParaRPr>
-          </a:p>
-        </p:txBody>
-      </p:sp>
-      <p:sp>
-        <p:nvSpPr>
-          <p:cNvPr id="95" name="뺄셈 기호 94"/>
-          <p:cNvSpPr/>
-          <p:nvPr/>
-        </p:nvSpPr>
-        <p:spPr>
-          <a:xfrm>
-            <a:off x="560746" y="770927"/>
-            <a:ext cx="317500" cy="283134"/>
-          </a:xfrm>
-          <a:prstGeom prst="mathMinus">
-            <a:avLst>
-              <a:gd name="adj1" fmla="val 23520"/>
-            </a:avLst>
-          </a:prstGeom>
-          <a:solidFill>
-            <a:srgbClr val="fce891"/>
-          </a:solidFill>
-          <a:ln>
-            <a:noFill/>
-          </a:ln>
-        </p:spPr>
-        <p:style>
-          <a:lnRef idx="2">
-            <a:schemeClr val="accent1">
-              <a:shade val="20000"/>
-            </a:schemeClr>
-          </a:lnRef>
-          <a:fillRef idx="1">
-            <a:schemeClr val="accent1"/>
-          </a:fillRef>
-          <a:effectRef idx="0">
-            <a:schemeClr val="accent1"/>
-          </a:effectRef>
-          <a:fontRef idx="minor">
-            <a:schemeClr val="lt1"/>
-          </a:fontRef>
-        </p:style>
-        <p:txBody>
-          <a:bodyPr anchor="ctr"/>
-          <a:lstStyle/>
-          <a:p>
-            <a:pPr lvl="0" algn="ctr">
-              <a:defRPr/>
-            </a:pPr>
-            <a:endParaRPr lang="ko-KR" altLang="en-US"/>
           </a:p>
         </p:txBody>
       </p:sp>
